--- a/it/slides/15-Architettura_dei_Calcolatori-Memoria.pptx
+++ b/it/slides/15-Architettura_dei_Calcolatori-Memoria.pptx
@@ -126,31 +126,31 @@
   <p:extLst>
     <p:ext uri="{521415D9-36F7-43E2-AB2F-B90AF26B5E84}">
       <p14:sectionLst xmlns:p14="http://schemas.microsoft.com/office/powerpoint/2010/main">
-        <p14:section name="Apertura" id="{de843288-ae4a-538f-6569-c6647e19573c}">
+        <p14:section name="Apertura" id="{ea5d4344-0a58-4acf-77ea-fa24e2363692}">
           <p14:sldIdLst>
             <p14:sldId id="256"/>
             <p14:sldId id="257"/>
           </p14:sldIdLst>
         </p14:section>
-        <p14:section name="Che cos'è una memoria?" id="{be8d9299-3f10-b7e8-b1ba-a457abf0b704}">
+        <p14:section name="Che cos'è una memoria?" id="{ed30f4d3-202d-0cf3-15e7-803659b64fbb}">
           <p14:sldIdLst>
             <p14:sldId id="258"/>
             <p14:sldId id="259"/>
           </p14:sldIdLst>
         </p14:section>
-        <p14:section name="Un po' di storia" id="{d55b56bc-10ef-46f3-f234-dc1b6a92c97b}">
+        <p14:section name="Un po' di storia" id="{1928c2ba-5adb-bd6d-dad3-166325c79ae6}">
           <p14:sldIdLst>
             <p14:sldId id="260"/>
             <p14:sldId id="261"/>
           </p14:sldIdLst>
         </p14:section>
-        <p14:section name="La memoria oggi" id="{938267c3-47d7-ef4b-b4ed-28b21e900e8c}">
+        <p14:section name="La memoria oggi" id="{1059e599-2452-366c-c185-c42d57327f46}">
           <p14:sldIdLst>
             <p14:sldId id="262"/>
             <p14:sldId id="263"/>
           </p14:sldIdLst>
         </p14:section>
-        <p14:section name="La memoria centrale" id="{be186b5b-8f75-a935-d8ec-15620074f276}">
+        <p14:section name="La memoria centrale" id="{dffd8c7d-76ac-1b9f-d9be-45a62313bb61}">
           <p14:sldIdLst>
             <p14:sldId id="264"/>
             <p14:sldId id="265"/>
@@ -158,13 +158,13 @@
             <p14:sldId id="267"/>
           </p14:sldIdLst>
         </p14:section>
-        <p14:section name="Processore e memoria" id="{c271a077-047b-e193-c1e1-b0c5ac665ce0}">
+        <p14:section name="Processore e memoria" id="{b909ac0c-b81c-65ae-c253-2ed2cd1e7a1b}">
           <p14:sldIdLst>
             <p14:sldId id="268"/>
             <p14:sldId id="269"/>
           </p14:sldIdLst>
         </p14:section>
-        <p14:section name="Memoria e ingresso/uscita" id="{8f68c793-ad29-f584-c2e2-696e4bbd3a86}">
+        <p14:section name="Memoria e ingresso/uscita" id="{1063300d-a958-d3ad-6568-b01a49ff4e62}">
           <p14:sldIdLst>
             <p14:sldId id="270"/>
             <p14:sldId id="271"/>
@@ -1915,7 +1915,8 @@
             <a:r>
               <a:rPr lang="en-US" dirty="0"/>
               <a:t>In una memoria a nuclei magnetici ogni bit è un anellino di ferrite, e il suo valore è il verso del campo magnetico nell'anello. È stata la memoria centrale dei calcolatori degli anni Cinquanta e Sessanta, e conservava il contenuto senza alimentazione. Le ricerche cominciarono con An Wang a Harvard nel 1949; Jay Forrester al MIT la rese pratica per il calcolatore Whirlwind. Guardate la fotografia: ogni anello è attraversato da fili, e un anello è un bit.
-Per il docente: In inglese: magnetic-core memory. Il pulse transfer controlling device di Wang usava un campo magnetico per controllare un sistema elettromeccanico.</a:t>
+Per il docente: In inglese: magnetic-core memory. Il pulse transfer controlling device di Wang usava un campo magnetico per controllare un sistema elettromeccanico.
+Immagini: HP 9101A extended memory unit.- magnetic core memory module - macro detail.jpg, Mister rf, CC BY-SA 4.0, Wikimedia Commons.</a:t>
             </a:r>
             <a:endParaRPr lang="en-US" dirty="0"/>
           </a:p>
@@ -2182,7 +2183,8 @@
             <a:r>
               <a:rPr lang="en-US" dirty="0"/>
               <a:t>Altre tecnologie. La RAM ferroelettrica conserva lo stato senza alimentazione. La memoria flash è persistente e si cancella a blocchi: è la memoria di chiavette USB, telefoni e dischi a stato solido. Una riga riguarda direttamente il vostro kit: in un microcontrollore il programma vive nella flash e le variabili nella SRAM. Per questo le vostre cartucce hanno una sezione di costanti e una di variabili. I moduli di memoria di un PC sono passati, negli anni, da pochi megabyte a decine di gigabyte ciascuno.
-Per il docente: Le fotografie dei moduli della presentazione originale (SIMM EDO, SDRAM PC100 32 MB, PC133 64 MB, Rambus PC800 128 MB, DDR PC2100, ECC registered 256 MB) sono riassunte qui. Flash e dischi a stato solido si trattano nella prossima lezione.</a:t>
+Per il docente: Le fotografie dei moduli della presentazione originale (SIMM EDO, SDRAM PC100 32 MB, PC133 64 MB, Rambus PC800 128 MB, DDR PC2100, ECC registered 256 MB) sono riassunte qui. Flash e dischi a stato solido si trattano nella prossima lezione.
+Immagini: Platinen-001 hg.jpg, Hannes Grobe, CC BY-SA 4.0, Wikimedia Commons.</a:t>
             </a:r>
             <a:endParaRPr lang="en-US" dirty="0"/>
           </a:p>
@@ -3301,7 +3303,63 @@
       </p:sp>
       <p:sp>
         <p:nvSpPr>
-          <p:cNvPr id="12" name="Shape 10"/>
+          <p:cNvPr id="12" name="Text 10"/>
+          <p:cNvSpPr txBox="1"/>
+          <p:nvPr/>
+        </p:nvSpPr>
+        <p:spPr>
+          <a:xfrm>
+            <a:off x="4693615" y="566928"/>
+            <a:ext cx="6949440" cy="640080"/>
+          </a:xfrm>
+          <a:prstGeom prst="rect">
+            <a:avLst/>
+          </a:prstGeom>
+          <a:noFill/>
+          <a:ln/>
+        </p:spPr>
+        <p:txBody>
+          <a:bodyPr wrap="square" lIns="0" tIns="0" rIns="0" bIns="0" rtlCol="0" anchor="t"/>
+          <a:lstStyle/>
+          <a:p>
+            <a:pPr algn="r" indent="0" marL="0">
+              <a:buNone/>
+            </a:pPr>
+            <a:r>
+              <a:rPr lang="en-US" sz="1300" dirty="0">
+                <a:solidFill>
+                  <a:srgbClr val="CFE3EA"/>
+                </a:solidFill>
+                <a:latin typeface="Calibri" pitchFamily="34" charset="0"/>
+                <a:ea typeface="Calibri" pitchFamily="34" charset="-122"/>
+                <a:cs typeface="Calibri" pitchFamily="34" charset="-120"/>
+              </a:rPr>
+              <a:t>Presentazione della lezione. I listati, il programma completo e come provarlo sono nella presentazione del codice:</a:t>
+            </a:r>
+            <a:endParaRPr lang="en-US" sz="1300" dirty="0"/>
+          </a:p>
+          <a:p>
+            <a:pPr algn="r" indent="0" marL="0">
+              <a:buNone/>
+            </a:pPr>
+            <a:r>
+              <a:rPr lang="en-US" sz="1300" dirty="0">
+                <a:solidFill>
+                  <a:srgbClr val="CFE3EA"/>
+                </a:solidFill>
+                <a:latin typeface="Calibri" pitchFamily="34" charset="0"/>
+                <a:ea typeface="Calibri" pitchFamily="34" charset="-122"/>
+                <a:cs typeface="Calibri" pitchFamily="34" charset="-120"/>
+              </a:rPr>
+              <a:t>15-Architettura_dei_Calcolatori-Memoria-Codice.pptx</a:t>
+            </a:r>
+            <a:endParaRPr lang="en-US" sz="1300" dirty="0"/>
+          </a:p>
+        </p:txBody>
+      </p:sp>
+      <p:sp>
+        <p:nvSpPr>
+          <p:cNvPr id="13" name="Shape 11"/>
           <p:cNvSpPr/>
           <p:nvPr/>
         </p:nvSpPr>
@@ -3328,7 +3386,7 @@
       </p:sp>
       <p:pic>
         <p:nvPicPr>
-          <p:cNvPr id="13" name="Image 0" descr="/Users/raffaelemontella/devel/riscv-prg32/computer-architecture-with-prg32/tools/assets/prg32qt_debugger.png">    </p:cNvPr>
+          <p:cNvPr id="14" name="Image 0" descr="/Users/raffaelemontella/devel/riscv-prg32/computer-architecture-with-prg32/tools/assets/prg32qt_debugger.png">    </p:cNvPr>
           <p:cNvPicPr>
             <a:picLocks noChangeAspect="1"/>
           </p:cNvPicPr>
@@ -15409,8 +15467,8 @@
         </p:blipFill>
         <p:spPr>
           <a:xfrm>
-            <a:off x="7863840" y="2148954"/>
-            <a:ext cx="3779215" cy="2834411"/>
+            <a:off x="7863840" y="2030365"/>
+            <a:ext cx="3779215" cy="3071591"/>
           </a:xfrm>
           <a:prstGeom prst="rect">
             <a:avLst/>
@@ -16863,8 +16921,8 @@
         </p:blipFill>
         <p:spPr>
           <a:xfrm>
-            <a:off x="8381184" y="1417320"/>
-            <a:ext cx="2744527" cy="4297680"/>
+            <a:off x="7863840" y="2323153"/>
+            <a:ext cx="3779215" cy="2486015"/>
           </a:xfrm>
           <a:prstGeom prst="rect">
             <a:avLst/>

--- a/it/slides/15-Architettura_dei_Calcolatori-Memoria.pptx
+++ b/it/slides/15-Architettura_dei_Calcolatori-Memoria.pptx
@@ -126,31 +126,31 @@
   <p:extLst>
     <p:ext uri="{521415D9-36F7-43E2-AB2F-B90AF26B5E84}">
       <p14:sectionLst xmlns:p14="http://schemas.microsoft.com/office/powerpoint/2010/main">
-        <p14:section name="Apertura" id="{ea5d4344-0a58-4acf-77ea-fa24e2363692}">
+        <p14:section name="Apertura" id="{c51570de-cbf2-f59e-319d-d0da99dd9b75}">
           <p14:sldIdLst>
             <p14:sldId id="256"/>
             <p14:sldId id="257"/>
           </p14:sldIdLst>
         </p14:section>
-        <p14:section name="Che cos'è una memoria?" id="{ed30f4d3-202d-0cf3-15e7-803659b64fbb}">
+        <p14:section name="Che cos'è una memoria?" id="{3e39806d-3de7-0e88-e46b-e17287c47b73}">
           <p14:sldIdLst>
             <p14:sldId id="258"/>
             <p14:sldId id="259"/>
           </p14:sldIdLst>
         </p14:section>
-        <p14:section name="Un po' di storia" id="{1928c2ba-5adb-bd6d-dad3-166325c79ae6}">
+        <p14:section name="Un po' di storia" id="{5f554f74-949c-5bd0-a19c-dde7c38fd53d}">
           <p14:sldIdLst>
             <p14:sldId id="260"/>
             <p14:sldId id="261"/>
           </p14:sldIdLst>
         </p14:section>
-        <p14:section name="La memoria oggi" id="{1059e599-2452-366c-c185-c42d57327f46}">
+        <p14:section name="La memoria oggi" id="{e8feaaae-befa-7a16-ac35-ac25fb5a9ecf}">
           <p14:sldIdLst>
             <p14:sldId id="262"/>
             <p14:sldId id="263"/>
           </p14:sldIdLst>
         </p14:section>
-        <p14:section name="La memoria centrale" id="{dffd8c7d-76ac-1b9f-d9be-45a62313bb61}">
+        <p14:section name="La memoria centrale" id="{6fb56d21-b42d-ce21-7abd-55253018385f}">
           <p14:sldIdLst>
             <p14:sldId id="264"/>
             <p14:sldId id="265"/>
@@ -158,13 +158,13 @@
             <p14:sldId id="267"/>
           </p14:sldIdLst>
         </p14:section>
-        <p14:section name="Processore e memoria" id="{b909ac0c-b81c-65ae-c253-2ed2cd1e7a1b}">
+        <p14:section name="Processore e memoria" id="{f5ce3ce4-2aae-24b6-c5f7-a055b5a7ea82}">
           <p14:sldIdLst>
             <p14:sldId id="268"/>
             <p14:sldId id="269"/>
           </p14:sldIdLst>
         </p14:section>
-        <p14:section name="Memoria e ingresso/uscita" id="{1063300d-a958-d3ad-6568-b01a49ff4e62}">
+        <p14:section name="Memoria e ingresso/uscita" id="{51c657da-9416-5145-0822-f46f20678f9d}">
           <p14:sldIdLst>
             <p14:sldId id="270"/>
             <p14:sldId id="271"/>
@@ -579,6 +579,8 @@
             <a:r>
               <a:rPr lang="en-US" dirty="0"/>
               <a:t>Usate la memoria dalla seconda lezione: ogni lw e ogni sw la legge o la scrive. Questa lezione spiega che cos'è una memoria, come è organizzata, e che cosa accade davvero tra il processore e la memoria quando si esegue un load. L'immagine in copertina è il debugger di PRG32-QT, la cui vista della memoria vi farà da microscopio. La citazione da Tron è una battuta con un lato serio: una macchina con memoria può conservare uno stato, e con uno stato può fare quasi tutto.
+Stato di apprendimento: DA COMPRENDERE OGGI, alla fine di questa lezione lo spiegate, lo seguite passo passo e lo applicate da soli; DA UTILIZZARE OGGI, oggi seguite e usate la ricetta; come funziona dentro si spiega più avanti, o non fa parte del corso; DA COMPRENDERE PIÙ AVANTI, riconoscete il nome e lo scopo; lo spiega una lezione successiva. Una slide senza etichetta è contesto: una storia, un esempio, una domanda, un esercizio.
+Stato di apprendimento di questa lezione. DA COMPRENDERE OGGI: memorie e indirizzi; l'ordine little-endian; processore e memoria; l'I/O mappato in memoria. DA UTILIZZARE OGGI: il programma completo, gli strumenti di PRG32 (si usa, non si studia, in questo corso). DA COMPRENDERE PIÙ AVANTI: niente. Una slide senza etichetta è contesto: una storia, un esempio, una domanda, un esercizio.
 Per il docente: Spirale: lw e lbu sulla stessa parola mostrano indirizzi di byte e ordine dei byte su una vera macchina RISC-V; la lezione spiega poi che cos'è una memoria, come è organizzata e come il processore le parla. La presentazione originale usava come esempio l'MC68000 (big-endian, niente parole disallineate): RISC-V ne prende il posto.</a:t>
             </a:r>
             <a:endParaRPr lang="en-US" dirty="0"/>
@@ -668,6 +670,7 @@
             <a:r>
               <a:rPr lang="en-US" dirty="0"/>
               <a:t>In una memoria indirizzabile al byte la più piccola unità dotata di indirizzo è il byte. Una parola di 32 bit occupa quindi quattro indirizzi consecutivi, e il suo indirizzo è quello del suo primo byte. La striscia mostra la parola del riscaldamento seguita da tre caratteri. Due conseguenze che avete già incontrato: il program counter avanza di 4 da un'istruzione alla successiva, e l'indice di un vettore di parole si moltiplica per 4. RISC-V ha load e store per ogni dimensione: byte, halfword e parole.
+DA COMPRENDERE OGGI: memorie e indirizzi.
 Per il docente: Ogni cella è un byte di otto bit, dal più significativo (bit 7) al meno significativo (bit 0).</a:t>
             </a:r>
             <a:endParaRPr lang="en-US" dirty="0"/>
@@ -757,6 +760,7 @@
             <a:r>
               <a:rPr lang="en-US" dirty="0"/>
               <a:t>I due ordini dei byte di una parola. Little-endian: il byte meno significativo all'indirizzo più basso. Big-endian: prima il byte più significativo. La stessa parola, 0x10A3E6FF, è mostrata memorizzata nei due modi. RISC-V è little-endian, come quasi tutti i processori oggi in uso; i protocolli di rete, per ragioni storiche, inviano i dati big-endian. La differenza si nota guardando la memoria byte per byte, o quando due macchine diverse si scambiano dati binari.
+DA COMPRENDERE OGGI: l'ordine little-endian.
 Per il docente: La presentazione originale contrapponeva l'MC68000 (big-endian) all'Intel x86 (little-endian); i valori dell'esempio sono gli stessi. Detti anche diretto (little) e inverso (big).</a:t>
             </a:r>
             <a:endParaRPr lang="en-US" dirty="0"/>
@@ -846,6 +850,7 @@
             <a:r>
               <a:rPr lang="en-US" dirty="0"/>
               <a:t>Due parametri descrivono una memoria: la capacità, cioè il numero di locazioni e i bit di ciascuna, e il tempo di accesso. I numeri del kit vanno ricordati: 512 KB di SRAM, 320 KB di ROM, e una flash esterna di alcuni megabyte. Di questi, il menu di PRG32 vi dice quanto resta ai vostri programmi: circa 98 KB di RAM e 509 KB di flash per le cartucce. È otto volte un Commodore 64, e una minuscola frazione di un portatile.
+DA COMPRENDERE OGGI: memorie e indirizzi.
 Per il docente: Valori dal datasheet dell'ESP32-C6 e dalla schermata Setup di PRG32 (RAM 98K, CART FLASH 509K, CART RAM 32K). Un Commodore 64 aveva 64 KB in tutto.</a:t>
             </a:r>
             <a:endParaRPr lang="en-US" dirty="0"/>
@@ -935,6 +940,7 @@
             <a:r>
               <a:rPr lang="en-US" dirty="0"/>
               <a:t>L'interfaccia. Dentro il processore due registri sono rivolti alla memoria: MA, il registro degli indirizzi di memoria, e MB, il registro dei dati di memoria. Li collegano alla memoria tre gruppi di linee: il bus indirizzi, che va in un solo verso, dal processore alla memoria; il bus dati, che va nei due versi; e le linee di controllo, abilitazione alla lettura e alla scrittura, che dicono che cosa si chiede. MA e MB appartengono al modello del processore: non sono tra i registri che usate in assembly.
+DA COMPRENDERE OGGI: processore e memoria.
 Per il docente: MA e MB sono registri interni del modello di processore del libro (Lezione 18): non sono tra i trentadue registri che vede un programmatore RISC-V.</a:t>
             </a:r>
             <a:endParaRPr lang="en-US" dirty="0"/>
@@ -1024,6 +1030,7 @@
             <a:r>
               <a:rPr lang="en-US" dirty="0"/>
               <a:t>Come fanno processore e memoria a mettersi d'accordo su quando il dato è pronto? Nella tecnica asincrona la memoria segnala con una linea quando ha finito, e il processore aspetta: più complessa, ma i due si possono progettare in modo indipendente. Nella tecnica sincrona un clock scandisce l'operazione, che si completa entro un ciclo la cui durata è scelta in base alla velocità della memoria: più semplice, ed è la regola dentro un singolo chip.
+DA COMPRENDERE OGGI: processore e memoria.
 Per il docente: L'operazione di lettura/scrittura si può codificare in modi diversi, per esempio una sola linea R/W qualificata da un'abilitazione.</a:t>
             </a:r>
             <a:endParaRPr lang="en-US" dirty="0"/>
@@ -1113,6 +1120,7 @@
             <a:r>
               <a:rPr lang="en-US" dirty="0"/>
               <a:t>Due modi di collegare ingresso e uscita. Con un bus unico, l'I/O mappato in memoria, memoria e dispositivi condividono lo stesso spazio di indirizzi: un registro di un dispositivo si legge e si scrive come una locazione di memoria, senza istruzioni speciali. Con bus separati, l'I/O isolato, ci sono due spazi di indirizzi e istruzioni dedicate. RISC-V segue la prima via: non ha alcuna istruzione di ingresso o di uscita, solo load e store.
+DA COMPRENDERE OGGI: l'I/O mappato in memoria.
 Per il docente: Il sottosistema di I/O permette al processore di interagire con dispositivi di ingresso (tastiera, mouse), di uscita (schermo, stampante) e di ingresso/uscita (memorie di massa, schede di rete, porte seriali).</a:t>
             </a:r>
             <a:endParaRPr lang="en-US" dirty="0"/>
@@ -1202,6 +1210,7 @@
             <a:r>
               <a:rPr lang="en-US" dirty="0"/>
               <a:t>Il bus è in realtà tre bus: dati, indirizzi e controllo. Un altro meccanismo completa il quadro. Con l'accesso diretto alla memoria, DMA, un dispositivo scambia interi blocchi di dati direttamente con la memoria: il processore avvia il trasferimento e viene avvisato quando è finito, senza copiare da sé ogni parola. Il display del kit riceve così ogni frame, e così l'amplificatore audio.
+DA COMPRENDERE OGGI: l'I/O mappato in memoria.
 Per il docente: Se più unità condividono il bus e possono accedere direttamente alla memoria, arbitra un controllore DMA. Sull'ESP32-C6 le periferiche SPI e I2S usano il DMA per trasmettere il frame buffer e i campioni audio.</a:t>
             </a:r>
             <a:endParaRPr lang="en-US" dirty="0"/>
@@ -1649,6 +1658,7 @@
             <a:r>
               <a:rPr lang="en-US" dirty="0"/>
               <a:t>Cinque conclusioni. La memoria è il componente che conserva lo stato dei dati. Tipi diversi servono a scopi diversi, perché nessuno è insieme veloce, grande ed economico. I dati si memorizzano come parole con indirizzi; RISC-V indirizza i byte e li ordina little-endian. L'accesso avviene per selezione sul bus indirizzi, trasferimento sul bus dati e linee di controllo. E in RISC-V i dispositivi si raggiungono come la memoria. La prossima lezione tratta la memoria che sopravvive quando manca l'alimentazione, e la cache.
+Stato di apprendimento, riepilogo. DA COMPRENDERE OGGI: memorie e indirizzi; l'ordine little-endian; processore e memoria; l'I/O mappato in memoria. DA UTILIZZARE OGGI: il programma completo, gli strumenti di PRG32 (si usa, non si studia, in questo corso). DA COMPRENDERE PIÙ AVANTI: niente. Una slide senza etichetta è contesto: una storia, un esempio, una domanda, un esercizio.
 Per il docente: Prossima lezione: la memoria permanente e la cache.</a:t>
             </a:r>
             <a:endParaRPr lang="en-US" dirty="0"/>
@@ -1737,7 +1747,8 @@
           <a:p>
             <a:r>
               <a:rPr lang="en-US" dirty="0"/>
-              <a:t>La memoria è la parte di un calcolatore dedicata a conservare i dati e le istruzioni dei programmi. La classificano due distinzioni. Le memorie volatili conservano l'informazione solo finché la macchina è alimentata; quelle persistenti la conservano a macchina spenta. In linea significa che i dati sono sempre accessibili; fuori linea significa che prima va montato un supporto, come un nastro preso da uno scaffale.</a:t>
+              <a:t>La memoria è la parte di un calcolatore dedicata a conservare i dati e le istruzioni dei programmi. La classificano due distinzioni. Le memorie volatili conservano l'informazione solo finché la macchina è alimentata; quelle persistenti la conservano a macchina spenta. In linea significa che i dati sono sempre accessibili; fuori linea significa che prima va montato un supporto, come un nastro preso da uno scaffale.
+DA COMPRENDERE OGGI: memorie e indirizzi.</a:t>
             </a:r>
             <a:endParaRPr lang="en-US" dirty="0"/>
           </a:p>
@@ -1826,6 +1837,7 @@
             <a:r>
               <a:rPr lang="en-US" dirty="0"/>
               <a:t>La gerarchia di memoria. In cima i registri, dentro il processore; poi la cache, la memoria centrale, i dischi a stato solido e magnetici, e infine nastri e supporti rimovibili. Salendo, le memorie sono più veloci e più costose per bit; scendendo, più grandi e più economiche. I livelli alti sono volatili, quelli bassi persistenti. L'ultima riga spiega perché la gerarchia esiste: nessuna tecnologia è insieme veloce, grande ed economica, quindi un calcolatore ne combina diverse.
+DA COMPRENDERE OGGI: memorie e indirizzi.
 Per il docente: Tipologie di memoria. Tempi di accesso tipici: registri e cache da meno di un nanosecondo a pochi nanosecondi; DRAM decine di nanosecondi; SSD decine di microsecondi; dischi magnetici millisecondi; nastro da secondi a minuti.</a:t>
             </a:r>
             <a:endParaRPr lang="en-US" dirty="0"/>
@@ -2094,6 +2106,7 @@
             <a:r>
               <a:rPr lang="en-US" dirty="0"/>
               <a:t>I due tipi di RAM. Nella RAM statica ogni bit è tenuto da un circuito bistabile come quelli della Lezione 13: conserva il valore finché c'è alimentazione, è veloce, e richiede diversi transistor per bit, quindi è costosa: si usa per le cache. Nella RAM dinamica ogni bit è una carica in un minuscolo condensatore dietro un transistor: è densa ed economica, ma la carica si disperde, quindi il contenuto va rinfrescato periodicamente: è la memoria centrale di portatili e telefoni. Il chip del kit ha solo SRAM.
+DA COMPRENDERE OGGI: memorie e indirizzi.
 Per il docente: DDR4 e DDR5 sono generazioni di SDRAM. L'ESP32-C6 ha 512 KB di SRAM e nessuna DRAM.</a:t>
             </a:r>
             <a:endParaRPr lang="en-US" dirty="0"/>
@@ -2183,6 +2196,7 @@
             <a:r>
               <a:rPr lang="en-US" dirty="0"/>
               <a:t>Altre tecnologie. La RAM ferroelettrica conserva lo stato senza alimentazione. La memoria flash è persistente e si cancella a blocchi: è la memoria di chiavette USB, telefoni e dischi a stato solido. Una riga riguarda direttamente il vostro kit: in un microcontrollore il programma vive nella flash e le variabili nella SRAM. Per questo le vostre cartucce hanno una sezione di costanti e una di variabili. I moduli di memoria di un PC sono passati, negli anni, da pochi megabyte a decine di gigabyte ciascuno.
+DA COMPRENDERE OGGI: memorie e indirizzi.
 Per il docente: Le fotografie dei moduli della presentazione originale (SIMM EDO, SDRAM PC100 32 MB, PC133 64 MB, Rambus PC800 128 MB, DDR PC2100, ECC registered 256 MB) sono riassunte qui. Flash e dischi a stato solido si trattano nella prossima lezione.
 Immagini: Platinen-001 hg.jpg, Hannes Grobe, CC BY-SA 4.0, Wikimedia Commons.</a:t>
             </a:r>
@@ -2273,6 +2287,7 @@
             <a:r>
               <a:rPr lang="en-US" dirty="0"/>
               <a:t>La memoria centrale è un vettore di parole, ciascuna una stringa di m bit che il processore legge o scrive con una sola operazione. Ogni parola ha un indirizzo, un numero da 0 a N meno 1 scritto su n bit, con N uguale a 2 alla n. L'indirizzo è una parola codice, e la memoria la decodifica. Accesso casuale significa che il tempo di accesso non dipende dalla posizione: ogni parola si raggiunge con la stessa rapidità. Trentadue bit di indirizzo danno quattro gibibyte di indirizzi.
+DA COMPRENDERE OGGI: memorie e indirizzi.
 Per il docente: Trentadue bit di indirizzo danno 2^32 indirizzi: 4 GiB. Il decodificatore della Lezione 11 e la piccola memoria della Lezione 14, su scala maggiore.</a:t>
             </a:r>
             <a:endParaRPr lang="en-US" dirty="0"/>
@@ -3410,6 +3425,420 @@
       </p:pic>
       <p:sp>
         <p:nvSpPr>
+          <p:cNvPr id="15" name="Shape 12"/>
+          <p:cNvSpPr/>
+          <p:nvPr/>
+        </p:nvSpPr>
+        <p:spPr>
+          <a:xfrm>
+            <a:off x="8910777" y="91440"/>
+            <a:ext cx="2732278" cy="274320"/>
+          </a:xfrm>
+          <a:prstGeom prst="rect">
+            <a:avLst/>
+          </a:prstGeom>
+          <a:solidFill>
+            <a:srgbClr val="F3E8FF"/>
+          </a:solidFill>
+          <a:ln w="12700">
+            <a:solidFill>
+              <a:srgbClr val="7E22CE"/>
+            </a:solidFill>
+            <a:prstDash val="dash"/>
+          </a:ln>
+        </p:spPr>
+      </p:sp>
+      <p:sp>
+        <p:nvSpPr>
+          <p:cNvPr id="16" name="Shape 13"/>
+          <p:cNvSpPr/>
+          <p:nvPr/>
+        </p:nvSpPr>
+        <p:spPr>
+          <a:xfrm>
+            <a:off x="8938209" y="128016"/>
+            <a:ext cx="45720" cy="45720"/>
+          </a:xfrm>
+          <a:prstGeom prst="rect">
+            <a:avLst/>
+          </a:prstGeom>
+          <a:solidFill>
+            <a:srgbClr val="7E22CE"/>
+          </a:solidFill>
+          <a:ln w="12700">
+            <a:solidFill>
+              <a:srgbClr val="7E22CE"/>
+            </a:solidFill>
+            <a:prstDash val="solid"/>
+          </a:ln>
+        </p:spPr>
+      </p:sp>
+      <p:sp>
+        <p:nvSpPr>
+          <p:cNvPr id="17" name="Shape 14"/>
+          <p:cNvSpPr/>
+          <p:nvPr/>
+        </p:nvSpPr>
+        <p:spPr>
+          <a:xfrm>
+            <a:off x="8938209" y="205740"/>
+            <a:ext cx="45720" cy="45720"/>
+          </a:xfrm>
+          <a:prstGeom prst="rect">
+            <a:avLst/>
+          </a:prstGeom>
+          <a:solidFill>
+            <a:srgbClr val="7E22CE"/>
+          </a:solidFill>
+          <a:ln w="12700">
+            <a:solidFill>
+              <a:srgbClr val="7E22CE"/>
+            </a:solidFill>
+            <a:prstDash val="solid"/>
+          </a:ln>
+        </p:spPr>
+      </p:sp>
+      <p:sp>
+        <p:nvSpPr>
+          <p:cNvPr id="18" name="Shape 15"/>
+          <p:cNvSpPr/>
+          <p:nvPr/>
+        </p:nvSpPr>
+        <p:spPr>
+          <a:xfrm>
+            <a:off x="8938209" y="283464"/>
+            <a:ext cx="45720" cy="45720"/>
+          </a:xfrm>
+          <a:prstGeom prst="rect">
+            <a:avLst/>
+          </a:prstGeom>
+          <a:solidFill>
+            <a:srgbClr val="7E22CE"/>
+          </a:solidFill>
+          <a:ln w="12700">
+            <a:solidFill>
+              <a:srgbClr val="7E22CE"/>
+            </a:solidFill>
+            <a:prstDash val="solid"/>
+          </a:ln>
+        </p:spPr>
+      </p:sp>
+      <p:pic>
+        <p:nvPicPr>
+          <p:cNvPr id="19" name="Image 1" descr="preencoded.png">    </p:cNvPr>
+          <p:cNvPicPr>
+            <a:picLocks noChangeAspect="1"/>
+          </p:cNvPicPr>
+          <p:nvPr/>
+        </p:nvPicPr>
+        <p:blipFill>
+          <a:blip r:embed="rId2"/>
+          <a:stretch>
+            <a:fillRect/>
+          </a:stretch>
+        </p:blipFill>
+        <p:spPr>
+          <a:xfrm>
+            <a:off x="9038793" y="128016"/>
+            <a:ext cx="201168" cy="201168"/>
+          </a:xfrm>
+          <a:prstGeom prst="rect">
+            <a:avLst/>
+          </a:prstGeom>
+        </p:spPr>
+      </p:pic>
+      <p:sp>
+        <p:nvSpPr>
+          <p:cNvPr id="20" name="Text 16"/>
+          <p:cNvSpPr txBox="1"/>
+          <p:nvPr/>
+        </p:nvSpPr>
+        <p:spPr>
+          <a:xfrm>
+            <a:off x="9294825" y="91440"/>
+            <a:ext cx="2311654" cy="274320"/>
+          </a:xfrm>
+          <a:prstGeom prst="rect">
+            <a:avLst/>
+          </a:prstGeom>
+          <a:noFill/>
+          <a:ln/>
+        </p:spPr>
+        <p:txBody>
+          <a:bodyPr wrap="square" lIns="0" tIns="0" rIns="0" bIns="0" rtlCol="0" anchor="ctr"/>
+          <a:lstStyle/>
+          <a:p>
+            <a:pPr indent="0" marL="0">
+              <a:buNone/>
+            </a:pPr>
+            <a:r>
+              <a:rPr lang="en-US" sz="1100" b="1" dirty="0">
+                <a:solidFill>
+                  <a:srgbClr val="6B21A8"/>
+                </a:solidFill>
+                <a:latin typeface="Calibri" pitchFamily="34" charset="0"/>
+                <a:ea typeface="Calibri" pitchFamily="34" charset="-122"/>
+                <a:cs typeface="Calibri" pitchFamily="34" charset="-120"/>
+              </a:rPr>
+              <a:t>DA COMPRENDERE PIÙ AVANTI</a:t>
+            </a:r>
+            <a:endParaRPr lang="en-US" sz="1100" dirty="0"/>
+          </a:p>
+        </p:txBody>
+      </p:sp>
+      <p:sp>
+        <p:nvSpPr>
+          <p:cNvPr id="21" name="Shape 17"/>
+          <p:cNvSpPr/>
+          <p:nvPr/>
+        </p:nvSpPr>
+        <p:spPr>
+          <a:xfrm>
+            <a:off x="6675069" y="91440"/>
+            <a:ext cx="2125980" cy="274320"/>
+          </a:xfrm>
+          <a:prstGeom prst="rect">
+            <a:avLst/>
+          </a:prstGeom>
+          <a:solidFill>
+            <a:srgbClr val="FEF3C7"/>
+          </a:solidFill>
+          <a:ln w="12700">
+            <a:solidFill>
+              <a:srgbClr val="B45309"/>
+            </a:solidFill>
+            <a:prstDash val="solid"/>
+          </a:ln>
+        </p:spPr>
+      </p:sp>
+      <p:sp>
+        <p:nvSpPr>
+          <p:cNvPr id="22" name="Shape 18"/>
+          <p:cNvSpPr/>
+          <p:nvPr/>
+        </p:nvSpPr>
+        <p:spPr>
+          <a:xfrm>
+            <a:off x="6675069" y="91440"/>
+            <a:ext cx="27432" cy="274320"/>
+          </a:xfrm>
+          <a:prstGeom prst="rect">
+            <a:avLst/>
+          </a:prstGeom>
+          <a:solidFill>
+            <a:srgbClr val="B45309"/>
+          </a:solidFill>
+          <a:ln w="12700">
+            <a:solidFill>
+              <a:srgbClr val="B45309"/>
+            </a:solidFill>
+            <a:prstDash val="solid"/>
+          </a:ln>
+        </p:spPr>
+      </p:sp>
+      <p:sp>
+        <p:nvSpPr>
+          <p:cNvPr id="23" name="Shape 19"/>
+          <p:cNvSpPr/>
+          <p:nvPr/>
+        </p:nvSpPr>
+        <p:spPr>
+          <a:xfrm>
+            <a:off x="6729933" y="91440"/>
+            <a:ext cx="27432" cy="274320"/>
+          </a:xfrm>
+          <a:prstGeom prst="rect">
+            <a:avLst/>
+          </a:prstGeom>
+          <a:solidFill>
+            <a:srgbClr val="B45309"/>
+          </a:solidFill>
+          <a:ln w="12700">
+            <a:solidFill>
+              <a:srgbClr val="B45309"/>
+            </a:solidFill>
+            <a:prstDash val="solid"/>
+          </a:ln>
+        </p:spPr>
+      </p:sp>
+      <p:pic>
+        <p:nvPicPr>
+          <p:cNvPr id="24" name="Image 2" descr="preencoded.png">    </p:cNvPr>
+          <p:cNvPicPr>
+            <a:picLocks noChangeAspect="1"/>
+          </p:cNvPicPr>
+          <p:nvPr/>
+        </p:nvPicPr>
+        <p:blipFill>
+          <a:blip r:embed="rId3"/>
+          <a:stretch>
+            <a:fillRect/>
+          </a:stretch>
+        </p:blipFill>
+        <p:spPr>
+          <a:xfrm>
+            <a:off x="6803085" y="128016"/>
+            <a:ext cx="201168" cy="201168"/>
+          </a:xfrm>
+          <a:prstGeom prst="rect">
+            <a:avLst/>
+          </a:prstGeom>
+        </p:spPr>
+      </p:pic>
+      <p:sp>
+        <p:nvSpPr>
+          <p:cNvPr id="25" name="Text 20"/>
+          <p:cNvSpPr txBox="1"/>
+          <p:nvPr/>
+        </p:nvSpPr>
+        <p:spPr>
+          <a:xfrm>
+            <a:off x="7059117" y="91440"/>
+            <a:ext cx="1705356" cy="274320"/>
+          </a:xfrm>
+          <a:prstGeom prst="rect">
+            <a:avLst/>
+          </a:prstGeom>
+          <a:noFill/>
+          <a:ln/>
+        </p:spPr>
+        <p:txBody>
+          <a:bodyPr wrap="square" lIns="0" tIns="0" rIns="0" bIns="0" rtlCol="0" anchor="ctr"/>
+          <a:lstStyle/>
+          <a:p>
+            <a:pPr indent="0" marL="0">
+              <a:buNone/>
+            </a:pPr>
+            <a:r>
+              <a:rPr lang="en-US" sz="1100" b="1" dirty="0">
+                <a:solidFill>
+                  <a:srgbClr val="92400E"/>
+                </a:solidFill>
+                <a:latin typeface="Calibri" pitchFamily="34" charset="0"/>
+                <a:ea typeface="Calibri" pitchFamily="34" charset="-122"/>
+                <a:cs typeface="Calibri" pitchFamily="34" charset="-120"/>
+              </a:rPr>
+              <a:t>DA UTILIZZARE OGGI</a:t>
+            </a:r>
+            <a:endParaRPr lang="en-US" sz="1100" dirty="0"/>
+          </a:p>
+        </p:txBody>
+      </p:sp>
+      <p:sp>
+        <p:nvSpPr>
+          <p:cNvPr id="26" name="Shape 21"/>
+          <p:cNvSpPr/>
+          <p:nvPr/>
+        </p:nvSpPr>
+        <p:spPr>
+          <a:xfrm>
+            <a:off x="4352747" y="91440"/>
+            <a:ext cx="2212594" cy="274320"/>
+          </a:xfrm>
+          <a:prstGeom prst="rect">
+            <a:avLst/>
+          </a:prstGeom>
+          <a:solidFill>
+            <a:srgbClr val="E0F2FE"/>
+          </a:solidFill>
+          <a:ln w="12700">
+            <a:solidFill>
+              <a:srgbClr val="0369A1"/>
+            </a:solidFill>
+            <a:prstDash val="solid"/>
+          </a:ln>
+        </p:spPr>
+      </p:sp>
+      <p:sp>
+        <p:nvSpPr>
+          <p:cNvPr id="27" name="Shape 22"/>
+          <p:cNvSpPr/>
+          <p:nvPr/>
+        </p:nvSpPr>
+        <p:spPr>
+          <a:xfrm>
+            <a:off x="4352747" y="91440"/>
+            <a:ext cx="73152" cy="274320"/>
+          </a:xfrm>
+          <a:prstGeom prst="rect">
+            <a:avLst/>
+          </a:prstGeom>
+          <a:solidFill>
+            <a:srgbClr val="0369A1"/>
+          </a:solidFill>
+          <a:ln w="12700">
+            <a:solidFill>
+              <a:srgbClr val="0369A1"/>
+            </a:solidFill>
+            <a:prstDash val="solid"/>
+          </a:ln>
+        </p:spPr>
+      </p:sp>
+      <p:pic>
+        <p:nvPicPr>
+          <p:cNvPr id="28" name="Image 3" descr="preencoded.png">    </p:cNvPr>
+          <p:cNvPicPr>
+            <a:picLocks noChangeAspect="1"/>
+          </p:cNvPicPr>
+          <p:nvPr/>
+        </p:nvPicPr>
+        <p:blipFill>
+          <a:blip r:embed="rId4"/>
+          <a:stretch>
+            <a:fillRect/>
+          </a:stretch>
+        </p:blipFill>
+        <p:spPr>
+          <a:xfrm>
+            <a:off x="4480763" y="128016"/>
+            <a:ext cx="201168" cy="201168"/>
+          </a:xfrm>
+          <a:prstGeom prst="rect">
+            <a:avLst/>
+          </a:prstGeom>
+        </p:spPr>
+      </p:pic>
+      <p:sp>
+        <p:nvSpPr>
+          <p:cNvPr id="29" name="Text 23"/>
+          <p:cNvSpPr txBox="1"/>
+          <p:nvPr/>
+        </p:nvSpPr>
+        <p:spPr>
+          <a:xfrm>
+            <a:off x="4736795" y="91440"/>
+            <a:ext cx="1791970" cy="274320"/>
+          </a:xfrm>
+          <a:prstGeom prst="rect">
+            <a:avLst/>
+          </a:prstGeom>
+          <a:noFill/>
+          <a:ln/>
+        </p:spPr>
+        <p:txBody>
+          <a:bodyPr wrap="square" lIns="0" tIns="0" rIns="0" bIns="0" rtlCol="0" anchor="ctr"/>
+          <a:lstStyle/>
+          <a:p>
+            <a:pPr indent="0" marL="0">
+              <a:buNone/>
+            </a:pPr>
+            <a:r>
+              <a:rPr lang="en-US" sz="1100" b="1" dirty="0">
+                <a:solidFill>
+                  <a:srgbClr val="075985"/>
+                </a:solidFill>
+                <a:latin typeface="Calibri" pitchFamily="34" charset="0"/>
+                <a:ea typeface="Calibri" pitchFamily="34" charset="-122"/>
+                <a:cs typeface="Calibri" pitchFamily="34" charset="-120"/>
+              </a:rPr>
+              <a:t>DA COMPRENDERE OGGI</a:t>
+            </a:r>
+            <a:endParaRPr lang="en-US" sz="1100" dirty="0"/>
+          </a:p>
+        </p:txBody>
+      </p:sp>
+      <p:sp>
+        <p:nvSpPr>
           <p:cNvPr id="25" name="Slide Number Placeholder 0"/>
           <p:cNvSpPr>
             <a:spLocks noGrp="1"/>
@@ -4570,6 +4999,133 @@
       </p:sp>
       <p:sp>
         <p:nvSpPr>
+          <p:cNvPr id="30" name="Shape 28"/>
+          <p:cNvSpPr/>
+          <p:nvPr/>
+        </p:nvSpPr>
+        <p:spPr>
+          <a:xfrm>
+            <a:off x="7985963" y="91440"/>
+            <a:ext cx="3657092" cy="274320"/>
+          </a:xfrm>
+          <a:prstGeom prst="rect">
+            <a:avLst/>
+          </a:prstGeom>
+          <a:solidFill>
+            <a:srgbClr val="E0F2FE"/>
+          </a:solidFill>
+          <a:ln w="12700">
+            <a:solidFill>
+              <a:srgbClr val="0369A1"/>
+            </a:solidFill>
+            <a:prstDash val="solid"/>
+          </a:ln>
+        </p:spPr>
+      </p:sp>
+      <p:sp>
+        <p:nvSpPr>
+          <p:cNvPr id="31" name="Shape 29"/>
+          <p:cNvSpPr/>
+          <p:nvPr/>
+        </p:nvSpPr>
+        <p:spPr>
+          <a:xfrm>
+            <a:off x="7985963" y="91440"/>
+            <a:ext cx="73152" cy="274320"/>
+          </a:xfrm>
+          <a:prstGeom prst="rect">
+            <a:avLst/>
+          </a:prstGeom>
+          <a:solidFill>
+            <a:srgbClr val="0369A1"/>
+          </a:solidFill>
+          <a:ln w="12700">
+            <a:solidFill>
+              <a:srgbClr val="0369A1"/>
+            </a:solidFill>
+            <a:prstDash val="solid"/>
+          </a:ln>
+        </p:spPr>
+      </p:sp>
+      <p:pic>
+        <p:nvPicPr>
+          <p:cNvPr id="32" name="Image 0" descr="preencoded.png">    </p:cNvPr>
+          <p:cNvPicPr>
+            <a:picLocks noChangeAspect="1"/>
+          </p:cNvPicPr>
+          <p:nvPr/>
+        </p:nvPicPr>
+        <p:blipFill>
+          <a:blip r:embed="rId1"/>
+          <a:stretch>
+            <a:fillRect/>
+          </a:stretch>
+        </p:blipFill>
+        <p:spPr>
+          <a:xfrm>
+            <a:off x="8113979" y="128016"/>
+            <a:ext cx="201168" cy="201168"/>
+          </a:xfrm>
+          <a:prstGeom prst="rect">
+            <a:avLst/>
+          </a:prstGeom>
+        </p:spPr>
+      </p:pic>
+      <p:sp>
+        <p:nvSpPr>
+          <p:cNvPr id="33" name="Text 30"/>
+          <p:cNvSpPr txBox="1"/>
+          <p:nvPr/>
+        </p:nvSpPr>
+        <p:spPr>
+          <a:xfrm>
+            <a:off x="8370011" y="91440"/>
+            <a:ext cx="3236468" cy="274320"/>
+          </a:xfrm>
+          <a:prstGeom prst="rect">
+            <a:avLst/>
+          </a:prstGeom>
+          <a:noFill/>
+          <a:ln/>
+        </p:spPr>
+        <p:txBody>
+          <a:bodyPr wrap="square" lIns="0" tIns="0" rIns="0" bIns="0" rtlCol="0" anchor="ctr"/>
+          <a:lstStyle/>
+          <a:p>
+            <a:pPr indent="0" marL="0">
+              <a:buNone/>
+            </a:pPr>
+            <a:r>
+              <a:rPr lang="en-US" sz="1100" b="1" dirty="0">
+                <a:solidFill>
+                  <a:srgbClr val="075985"/>
+                </a:solidFill>
+                <a:latin typeface="Calibri" pitchFamily="34" charset="0"/>
+                <a:ea typeface="Calibri" pitchFamily="34" charset="-122"/>
+                <a:cs typeface="Calibri" pitchFamily="34" charset="-120"/>
+              </a:rPr>
+              <a:t>DA COMPRENDERE OGGI</a:t>
+            </a:r>
+            <a:pPr indent="0" marL="0">
+              <a:buNone/>
+            </a:pPr>
+            <a:r>
+              <a:rPr lang="en-US" sz="1100" dirty="0">
+                <a:solidFill>
+                  <a:srgbClr val="075985"/>
+                </a:solidFill>
+                <a:latin typeface="Calibri" pitchFamily="34" charset="0"/>
+                <a:ea typeface="Calibri" pitchFamily="34" charset="-122"/>
+                <a:cs typeface="Calibri" pitchFamily="34" charset="-120"/>
+              </a:rPr>
+              <a:t> · memorie e indirizzi</a:t>
+            </a:r>
+            <a:endParaRPr lang="en-US" sz="1100" dirty="0"/>
+          </a:p>
+        </p:txBody>
+      </p:sp>
+      <p:sp>
+        <p:nvSpPr>
           <p:cNvPr id="25" name="Slide Number Placeholder 0"/>
           <p:cNvSpPr>
             <a:spLocks noGrp="1"/>
@@ -5708,6 +6264,133 @@
       </p:sp>
       <p:sp>
         <p:nvSpPr>
+          <p:cNvPr id="28" name="Shape 26"/>
+          <p:cNvSpPr/>
+          <p:nvPr/>
+        </p:nvSpPr>
+        <p:spPr>
+          <a:xfrm>
+            <a:off x="7788986" y="91440"/>
+            <a:ext cx="3854069" cy="274320"/>
+          </a:xfrm>
+          <a:prstGeom prst="rect">
+            <a:avLst/>
+          </a:prstGeom>
+          <a:solidFill>
+            <a:srgbClr val="E0F2FE"/>
+          </a:solidFill>
+          <a:ln w="12700">
+            <a:solidFill>
+              <a:srgbClr val="0369A1"/>
+            </a:solidFill>
+            <a:prstDash val="solid"/>
+          </a:ln>
+        </p:spPr>
+      </p:sp>
+      <p:sp>
+        <p:nvSpPr>
+          <p:cNvPr id="29" name="Shape 27"/>
+          <p:cNvSpPr/>
+          <p:nvPr/>
+        </p:nvSpPr>
+        <p:spPr>
+          <a:xfrm>
+            <a:off x="7788986" y="91440"/>
+            <a:ext cx="73152" cy="274320"/>
+          </a:xfrm>
+          <a:prstGeom prst="rect">
+            <a:avLst/>
+          </a:prstGeom>
+          <a:solidFill>
+            <a:srgbClr val="0369A1"/>
+          </a:solidFill>
+          <a:ln w="12700">
+            <a:solidFill>
+              <a:srgbClr val="0369A1"/>
+            </a:solidFill>
+            <a:prstDash val="solid"/>
+          </a:ln>
+        </p:spPr>
+      </p:sp>
+      <p:pic>
+        <p:nvPicPr>
+          <p:cNvPr id="30" name="Image 0" descr="preencoded.png">    </p:cNvPr>
+          <p:cNvPicPr>
+            <a:picLocks noChangeAspect="1"/>
+          </p:cNvPicPr>
+          <p:nvPr/>
+        </p:nvPicPr>
+        <p:blipFill>
+          <a:blip r:embed="rId1"/>
+          <a:stretch>
+            <a:fillRect/>
+          </a:stretch>
+        </p:blipFill>
+        <p:spPr>
+          <a:xfrm>
+            <a:off x="7917002" y="128016"/>
+            <a:ext cx="201168" cy="201168"/>
+          </a:xfrm>
+          <a:prstGeom prst="rect">
+            <a:avLst/>
+          </a:prstGeom>
+        </p:spPr>
+      </p:pic>
+      <p:sp>
+        <p:nvSpPr>
+          <p:cNvPr id="31" name="Text 28"/>
+          <p:cNvSpPr txBox="1"/>
+          <p:nvPr/>
+        </p:nvSpPr>
+        <p:spPr>
+          <a:xfrm>
+            <a:off x="8173034" y="91440"/>
+            <a:ext cx="3433445" cy="274320"/>
+          </a:xfrm>
+          <a:prstGeom prst="rect">
+            <a:avLst/>
+          </a:prstGeom>
+          <a:noFill/>
+          <a:ln/>
+        </p:spPr>
+        <p:txBody>
+          <a:bodyPr wrap="square" lIns="0" tIns="0" rIns="0" bIns="0" rtlCol="0" anchor="ctr"/>
+          <a:lstStyle/>
+          <a:p>
+            <a:pPr indent="0" marL="0">
+              <a:buNone/>
+            </a:pPr>
+            <a:r>
+              <a:rPr lang="en-US" sz="1100" b="1" dirty="0">
+                <a:solidFill>
+                  <a:srgbClr val="075985"/>
+                </a:solidFill>
+                <a:latin typeface="Calibri" pitchFamily="34" charset="0"/>
+                <a:ea typeface="Calibri" pitchFamily="34" charset="-122"/>
+                <a:cs typeface="Calibri" pitchFamily="34" charset="-120"/>
+              </a:rPr>
+              <a:t>DA COMPRENDERE OGGI</a:t>
+            </a:r>
+            <a:pPr indent="0" marL="0">
+              <a:buNone/>
+            </a:pPr>
+            <a:r>
+              <a:rPr lang="en-US" sz="1100" dirty="0">
+                <a:solidFill>
+                  <a:srgbClr val="075985"/>
+                </a:solidFill>
+                <a:latin typeface="Calibri" pitchFamily="34" charset="0"/>
+                <a:ea typeface="Calibri" pitchFamily="34" charset="-122"/>
+                <a:cs typeface="Calibri" pitchFamily="34" charset="-120"/>
+              </a:rPr>
+              <a:t> · l'ordine little-endian</a:t>
+            </a:r>
+            <a:endParaRPr lang="en-US" sz="1100" dirty="0"/>
+          </a:p>
+        </p:txBody>
+      </p:sp>
+      <p:sp>
+        <p:nvSpPr>
           <p:cNvPr id="25" name="Slide Number Placeholder 0"/>
           <p:cNvSpPr>
             <a:spLocks noGrp="1"/>
@@ -6235,6 +6918,133 @@
       </p:sp>
       <p:sp>
         <p:nvSpPr>
+          <p:cNvPr id="14" name="Shape 12"/>
+          <p:cNvSpPr/>
+          <p:nvPr/>
+        </p:nvSpPr>
+        <p:spPr>
+          <a:xfrm>
+            <a:off x="7985963" y="91440"/>
+            <a:ext cx="3657092" cy="274320"/>
+          </a:xfrm>
+          <a:prstGeom prst="rect">
+            <a:avLst/>
+          </a:prstGeom>
+          <a:solidFill>
+            <a:srgbClr val="E0F2FE"/>
+          </a:solidFill>
+          <a:ln w="12700">
+            <a:solidFill>
+              <a:srgbClr val="0369A1"/>
+            </a:solidFill>
+            <a:prstDash val="solid"/>
+          </a:ln>
+        </p:spPr>
+      </p:sp>
+      <p:sp>
+        <p:nvSpPr>
+          <p:cNvPr id="15" name="Shape 13"/>
+          <p:cNvSpPr/>
+          <p:nvPr/>
+        </p:nvSpPr>
+        <p:spPr>
+          <a:xfrm>
+            <a:off x="7985963" y="91440"/>
+            <a:ext cx="73152" cy="274320"/>
+          </a:xfrm>
+          <a:prstGeom prst="rect">
+            <a:avLst/>
+          </a:prstGeom>
+          <a:solidFill>
+            <a:srgbClr val="0369A1"/>
+          </a:solidFill>
+          <a:ln w="12700">
+            <a:solidFill>
+              <a:srgbClr val="0369A1"/>
+            </a:solidFill>
+            <a:prstDash val="solid"/>
+          </a:ln>
+        </p:spPr>
+      </p:sp>
+      <p:pic>
+        <p:nvPicPr>
+          <p:cNvPr id="16" name="Image 0" descr="preencoded.png">    </p:cNvPr>
+          <p:cNvPicPr>
+            <a:picLocks noChangeAspect="1"/>
+          </p:cNvPicPr>
+          <p:nvPr/>
+        </p:nvPicPr>
+        <p:blipFill>
+          <a:blip r:embed="rId1"/>
+          <a:stretch>
+            <a:fillRect/>
+          </a:stretch>
+        </p:blipFill>
+        <p:spPr>
+          <a:xfrm>
+            <a:off x="8113979" y="128016"/>
+            <a:ext cx="201168" cy="201168"/>
+          </a:xfrm>
+          <a:prstGeom prst="rect">
+            <a:avLst/>
+          </a:prstGeom>
+        </p:spPr>
+      </p:pic>
+      <p:sp>
+        <p:nvSpPr>
+          <p:cNvPr id="17" name="Text 14"/>
+          <p:cNvSpPr txBox="1"/>
+          <p:nvPr/>
+        </p:nvSpPr>
+        <p:spPr>
+          <a:xfrm>
+            <a:off x="8370011" y="91440"/>
+            <a:ext cx="3236468" cy="274320"/>
+          </a:xfrm>
+          <a:prstGeom prst="rect">
+            <a:avLst/>
+          </a:prstGeom>
+          <a:noFill/>
+          <a:ln/>
+        </p:spPr>
+        <p:txBody>
+          <a:bodyPr wrap="square" lIns="0" tIns="0" rIns="0" bIns="0" rtlCol="0" anchor="ctr"/>
+          <a:lstStyle/>
+          <a:p>
+            <a:pPr indent="0" marL="0">
+              <a:buNone/>
+            </a:pPr>
+            <a:r>
+              <a:rPr lang="en-US" sz="1100" b="1" dirty="0">
+                <a:solidFill>
+                  <a:srgbClr val="075985"/>
+                </a:solidFill>
+                <a:latin typeface="Calibri" pitchFamily="34" charset="0"/>
+                <a:ea typeface="Calibri" pitchFamily="34" charset="-122"/>
+                <a:cs typeface="Calibri" pitchFamily="34" charset="-120"/>
+              </a:rPr>
+              <a:t>DA COMPRENDERE OGGI</a:t>
+            </a:r>
+            <a:pPr indent="0" marL="0">
+              <a:buNone/>
+            </a:pPr>
+            <a:r>
+              <a:rPr lang="en-US" sz="1100" dirty="0">
+                <a:solidFill>
+                  <a:srgbClr val="075985"/>
+                </a:solidFill>
+                <a:latin typeface="Calibri" pitchFamily="34" charset="0"/>
+                <a:ea typeface="Calibri" pitchFamily="34" charset="-122"/>
+                <a:cs typeface="Calibri" pitchFamily="34" charset="-120"/>
+              </a:rPr>
+              <a:t> · memorie e indirizzi</a:t>
+            </a:r>
+            <a:endParaRPr lang="en-US" sz="1100" dirty="0"/>
+          </a:p>
+        </p:txBody>
+      </p:sp>
+      <p:sp>
+        <p:nvSpPr>
           <p:cNvPr id="25" name="Slide Number Placeholder 0"/>
           <p:cNvSpPr>
             <a:spLocks noGrp="1"/>
@@ -6930,6 +7740,133 @@
       </p:sp>
       <p:sp>
         <p:nvSpPr>
+          <p:cNvPr id="18" name="Shape 16"/>
+          <p:cNvSpPr/>
+          <p:nvPr/>
+        </p:nvSpPr>
+        <p:spPr>
+          <a:xfrm>
+            <a:off x="7920304" y="91440"/>
+            <a:ext cx="3722751" cy="274320"/>
+          </a:xfrm>
+          <a:prstGeom prst="rect">
+            <a:avLst/>
+          </a:prstGeom>
+          <a:solidFill>
+            <a:srgbClr val="E0F2FE"/>
+          </a:solidFill>
+          <a:ln w="12700">
+            <a:solidFill>
+              <a:srgbClr val="0369A1"/>
+            </a:solidFill>
+            <a:prstDash val="solid"/>
+          </a:ln>
+        </p:spPr>
+      </p:sp>
+      <p:sp>
+        <p:nvSpPr>
+          <p:cNvPr id="19" name="Shape 17"/>
+          <p:cNvSpPr/>
+          <p:nvPr/>
+        </p:nvSpPr>
+        <p:spPr>
+          <a:xfrm>
+            <a:off x="7920304" y="91440"/>
+            <a:ext cx="73152" cy="274320"/>
+          </a:xfrm>
+          <a:prstGeom prst="rect">
+            <a:avLst/>
+          </a:prstGeom>
+          <a:solidFill>
+            <a:srgbClr val="0369A1"/>
+          </a:solidFill>
+          <a:ln w="12700">
+            <a:solidFill>
+              <a:srgbClr val="0369A1"/>
+            </a:solidFill>
+            <a:prstDash val="solid"/>
+          </a:ln>
+        </p:spPr>
+      </p:sp>
+      <p:pic>
+        <p:nvPicPr>
+          <p:cNvPr id="20" name="Image 0" descr="preencoded.png">    </p:cNvPr>
+          <p:cNvPicPr>
+            <a:picLocks noChangeAspect="1"/>
+          </p:cNvPicPr>
+          <p:nvPr/>
+        </p:nvPicPr>
+        <p:blipFill>
+          <a:blip r:embed="rId1"/>
+          <a:stretch>
+            <a:fillRect/>
+          </a:stretch>
+        </p:blipFill>
+        <p:spPr>
+          <a:xfrm>
+            <a:off x="8048320" y="128016"/>
+            <a:ext cx="201168" cy="201168"/>
+          </a:xfrm>
+          <a:prstGeom prst="rect">
+            <a:avLst/>
+          </a:prstGeom>
+        </p:spPr>
+      </p:pic>
+      <p:sp>
+        <p:nvSpPr>
+          <p:cNvPr id="21" name="Text 18"/>
+          <p:cNvSpPr txBox="1"/>
+          <p:nvPr/>
+        </p:nvSpPr>
+        <p:spPr>
+          <a:xfrm>
+            <a:off x="8304352" y="91440"/>
+            <a:ext cx="3302127" cy="274320"/>
+          </a:xfrm>
+          <a:prstGeom prst="rect">
+            <a:avLst/>
+          </a:prstGeom>
+          <a:noFill/>
+          <a:ln/>
+        </p:spPr>
+        <p:txBody>
+          <a:bodyPr wrap="square" lIns="0" tIns="0" rIns="0" bIns="0" rtlCol="0" anchor="ctr"/>
+          <a:lstStyle/>
+          <a:p>
+            <a:pPr indent="0" marL="0">
+              <a:buNone/>
+            </a:pPr>
+            <a:r>
+              <a:rPr lang="en-US" sz="1100" b="1" dirty="0">
+                <a:solidFill>
+                  <a:srgbClr val="075985"/>
+                </a:solidFill>
+                <a:latin typeface="Calibri" pitchFamily="34" charset="0"/>
+                <a:ea typeface="Calibri" pitchFamily="34" charset="-122"/>
+                <a:cs typeface="Calibri" pitchFamily="34" charset="-120"/>
+              </a:rPr>
+              <a:t>DA COMPRENDERE OGGI</a:t>
+            </a:r>
+            <a:pPr indent="0" marL="0">
+              <a:buNone/>
+            </a:pPr>
+            <a:r>
+              <a:rPr lang="en-US" sz="1100" dirty="0">
+                <a:solidFill>
+                  <a:srgbClr val="075985"/>
+                </a:solidFill>
+                <a:latin typeface="Calibri" pitchFamily="34" charset="0"/>
+                <a:ea typeface="Calibri" pitchFamily="34" charset="-122"/>
+                <a:cs typeface="Calibri" pitchFamily="34" charset="-120"/>
+              </a:rPr>
+              <a:t> · processore e memoria</a:t>
+            </a:r>
+            <a:endParaRPr lang="en-US" sz="1100" dirty="0"/>
+          </a:p>
+        </p:txBody>
+      </p:sp>
+      <p:sp>
+        <p:nvSpPr>
           <p:cNvPr id="25" name="Slide Number Placeholder 0"/>
           <p:cNvSpPr>
             <a:spLocks noGrp="1"/>
@@ -7383,6 +8320,133 @@
       </p:sp>
       <p:sp>
         <p:nvSpPr>
+          <p:cNvPr id="9" name="Shape 7"/>
+          <p:cNvSpPr/>
+          <p:nvPr/>
+        </p:nvSpPr>
+        <p:spPr>
+          <a:xfrm>
+            <a:off x="7920304" y="91440"/>
+            <a:ext cx="3722751" cy="274320"/>
+          </a:xfrm>
+          <a:prstGeom prst="rect">
+            <a:avLst/>
+          </a:prstGeom>
+          <a:solidFill>
+            <a:srgbClr val="E0F2FE"/>
+          </a:solidFill>
+          <a:ln w="12700">
+            <a:solidFill>
+              <a:srgbClr val="0369A1"/>
+            </a:solidFill>
+            <a:prstDash val="solid"/>
+          </a:ln>
+        </p:spPr>
+      </p:sp>
+      <p:sp>
+        <p:nvSpPr>
+          <p:cNvPr id="10" name="Shape 8"/>
+          <p:cNvSpPr/>
+          <p:nvPr/>
+        </p:nvSpPr>
+        <p:spPr>
+          <a:xfrm>
+            <a:off x="7920304" y="91440"/>
+            <a:ext cx="73152" cy="274320"/>
+          </a:xfrm>
+          <a:prstGeom prst="rect">
+            <a:avLst/>
+          </a:prstGeom>
+          <a:solidFill>
+            <a:srgbClr val="0369A1"/>
+          </a:solidFill>
+          <a:ln w="12700">
+            <a:solidFill>
+              <a:srgbClr val="0369A1"/>
+            </a:solidFill>
+            <a:prstDash val="solid"/>
+          </a:ln>
+        </p:spPr>
+      </p:sp>
+      <p:pic>
+        <p:nvPicPr>
+          <p:cNvPr id="11" name="Image 0" descr="preencoded.png">    </p:cNvPr>
+          <p:cNvPicPr>
+            <a:picLocks noChangeAspect="1"/>
+          </p:cNvPicPr>
+          <p:nvPr/>
+        </p:nvPicPr>
+        <p:blipFill>
+          <a:blip r:embed="rId1"/>
+          <a:stretch>
+            <a:fillRect/>
+          </a:stretch>
+        </p:blipFill>
+        <p:spPr>
+          <a:xfrm>
+            <a:off x="8048320" y="128016"/>
+            <a:ext cx="201168" cy="201168"/>
+          </a:xfrm>
+          <a:prstGeom prst="rect">
+            <a:avLst/>
+          </a:prstGeom>
+        </p:spPr>
+      </p:pic>
+      <p:sp>
+        <p:nvSpPr>
+          <p:cNvPr id="12" name="Text 9"/>
+          <p:cNvSpPr txBox="1"/>
+          <p:nvPr/>
+        </p:nvSpPr>
+        <p:spPr>
+          <a:xfrm>
+            <a:off x="8304352" y="91440"/>
+            <a:ext cx="3302127" cy="274320"/>
+          </a:xfrm>
+          <a:prstGeom prst="rect">
+            <a:avLst/>
+          </a:prstGeom>
+          <a:noFill/>
+          <a:ln/>
+        </p:spPr>
+        <p:txBody>
+          <a:bodyPr wrap="square" lIns="0" tIns="0" rIns="0" bIns="0" rtlCol="0" anchor="ctr"/>
+          <a:lstStyle/>
+          <a:p>
+            <a:pPr indent="0" marL="0">
+              <a:buNone/>
+            </a:pPr>
+            <a:r>
+              <a:rPr lang="en-US" sz="1100" b="1" dirty="0">
+                <a:solidFill>
+                  <a:srgbClr val="075985"/>
+                </a:solidFill>
+                <a:latin typeface="Calibri" pitchFamily="34" charset="0"/>
+                <a:ea typeface="Calibri" pitchFamily="34" charset="-122"/>
+                <a:cs typeface="Calibri" pitchFamily="34" charset="-120"/>
+              </a:rPr>
+              <a:t>DA COMPRENDERE OGGI</a:t>
+            </a:r>
+            <a:pPr indent="0" marL="0">
+              <a:buNone/>
+            </a:pPr>
+            <a:r>
+              <a:rPr lang="en-US" sz="1100" dirty="0">
+                <a:solidFill>
+                  <a:srgbClr val="075985"/>
+                </a:solidFill>
+                <a:latin typeface="Calibri" pitchFamily="34" charset="0"/>
+                <a:ea typeface="Calibri" pitchFamily="34" charset="-122"/>
+                <a:cs typeface="Calibri" pitchFamily="34" charset="-120"/>
+              </a:rPr>
+              <a:t> · processore e memoria</a:t>
+            </a:r>
+            <a:endParaRPr lang="en-US" sz="1100" dirty="0"/>
+          </a:p>
+        </p:txBody>
+      </p:sp>
+      <p:sp>
+        <p:nvSpPr>
           <p:cNvPr id="25" name="Slide Number Placeholder 0"/>
           <p:cNvSpPr>
             <a:spLocks noGrp="1"/>
@@ -7836,6 +8900,133 @@
       </p:sp>
       <p:sp>
         <p:nvSpPr>
+          <p:cNvPr id="9" name="Shape 7"/>
+          <p:cNvSpPr/>
+          <p:nvPr/>
+        </p:nvSpPr>
+        <p:spPr>
+          <a:xfrm>
+            <a:off x="7657668" y="91440"/>
+            <a:ext cx="3985387" cy="274320"/>
+          </a:xfrm>
+          <a:prstGeom prst="rect">
+            <a:avLst/>
+          </a:prstGeom>
+          <a:solidFill>
+            <a:srgbClr val="E0F2FE"/>
+          </a:solidFill>
+          <a:ln w="12700">
+            <a:solidFill>
+              <a:srgbClr val="0369A1"/>
+            </a:solidFill>
+            <a:prstDash val="solid"/>
+          </a:ln>
+        </p:spPr>
+      </p:sp>
+      <p:sp>
+        <p:nvSpPr>
+          <p:cNvPr id="10" name="Shape 8"/>
+          <p:cNvSpPr/>
+          <p:nvPr/>
+        </p:nvSpPr>
+        <p:spPr>
+          <a:xfrm>
+            <a:off x="7657668" y="91440"/>
+            <a:ext cx="73152" cy="274320"/>
+          </a:xfrm>
+          <a:prstGeom prst="rect">
+            <a:avLst/>
+          </a:prstGeom>
+          <a:solidFill>
+            <a:srgbClr val="0369A1"/>
+          </a:solidFill>
+          <a:ln w="12700">
+            <a:solidFill>
+              <a:srgbClr val="0369A1"/>
+            </a:solidFill>
+            <a:prstDash val="solid"/>
+          </a:ln>
+        </p:spPr>
+      </p:sp>
+      <p:pic>
+        <p:nvPicPr>
+          <p:cNvPr id="11" name="Image 0" descr="preencoded.png">    </p:cNvPr>
+          <p:cNvPicPr>
+            <a:picLocks noChangeAspect="1"/>
+          </p:cNvPicPr>
+          <p:nvPr/>
+        </p:nvPicPr>
+        <p:blipFill>
+          <a:blip r:embed="rId1"/>
+          <a:stretch>
+            <a:fillRect/>
+          </a:stretch>
+        </p:blipFill>
+        <p:spPr>
+          <a:xfrm>
+            <a:off x="7785684" y="128016"/>
+            <a:ext cx="201168" cy="201168"/>
+          </a:xfrm>
+          <a:prstGeom prst="rect">
+            <a:avLst/>
+          </a:prstGeom>
+        </p:spPr>
+      </p:pic>
+      <p:sp>
+        <p:nvSpPr>
+          <p:cNvPr id="12" name="Text 9"/>
+          <p:cNvSpPr txBox="1"/>
+          <p:nvPr/>
+        </p:nvSpPr>
+        <p:spPr>
+          <a:xfrm>
+            <a:off x="8041716" y="91440"/>
+            <a:ext cx="3564763" cy="274320"/>
+          </a:xfrm>
+          <a:prstGeom prst="rect">
+            <a:avLst/>
+          </a:prstGeom>
+          <a:noFill/>
+          <a:ln/>
+        </p:spPr>
+        <p:txBody>
+          <a:bodyPr wrap="square" lIns="0" tIns="0" rIns="0" bIns="0" rtlCol="0" anchor="ctr"/>
+          <a:lstStyle/>
+          <a:p>
+            <a:pPr indent="0" marL="0">
+              <a:buNone/>
+            </a:pPr>
+            <a:r>
+              <a:rPr lang="en-US" sz="1100" b="1" dirty="0">
+                <a:solidFill>
+                  <a:srgbClr val="075985"/>
+                </a:solidFill>
+                <a:latin typeface="Calibri" pitchFamily="34" charset="0"/>
+                <a:ea typeface="Calibri" pitchFamily="34" charset="-122"/>
+                <a:cs typeface="Calibri" pitchFamily="34" charset="-120"/>
+              </a:rPr>
+              <a:t>DA COMPRENDERE OGGI</a:t>
+            </a:r>
+            <a:pPr indent="0" marL="0">
+              <a:buNone/>
+            </a:pPr>
+            <a:r>
+              <a:rPr lang="en-US" sz="1100" dirty="0">
+                <a:solidFill>
+                  <a:srgbClr val="075985"/>
+                </a:solidFill>
+                <a:latin typeface="Calibri" pitchFamily="34" charset="0"/>
+                <a:ea typeface="Calibri" pitchFamily="34" charset="-122"/>
+                <a:cs typeface="Calibri" pitchFamily="34" charset="-120"/>
+              </a:rPr>
+              <a:t> · l'I/O mappato in memoria</a:t>
+            </a:r>
+            <a:endParaRPr lang="en-US" sz="1100" dirty="0"/>
+          </a:p>
+        </p:txBody>
+      </p:sp>
+      <p:sp>
+        <p:nvSpPr>
           <p:cNvPr id="25" name="Slide Number Placeholder 0"/>
           <p:cNvSpPr>
             <a:spLocks noGrp="1"/>
@@ -8246,6 +9437,133 @@
               <a:t>Il display del kit riceve così ogni frame: il processore non copia i pixel uno per uno</a:t>
             </a:r>
             <a:endParaRPr lang="en-US" sz="2400" dirty="0"/>
+          </a:p>
+        </p:txBody>
+      </p:sp>
+      <p:sp>
+        <p:nvSpPr>
+          <p:cNvPr id="9" name="Shape 7"/>
+          <p:cNvSpPr/>
+          <p:nvPr/>
+        </p:nvSpPr>
+        <p:spPr>
+          <a:xfrm>
+            <a:off x="7657668" y="91440"/>
+            <a:ext cx="3985387" cy="274320"/>
+          </a:xfrm>
+          <a:prstGeom prst="rect">
+            <a:avLst/>
+          </a:prstGeom>
+          <a:solidFill>
+            <a:srgbClr val="E0F2FE"/>
+          </a:solidFill>
+          <a:ln w="12700">
+            <a:solidFill>
+              <a:srgbClr val="0369A1"/>
+            </a:solidFill>
+            <a:prstDash val="solid"/>
+          </a:ln>
+        </p:spPr>
+      </p:sp>
+      <p:sp>
+        <p:nvSpPr>
+          <p:cNvPr id="10" name="Shape 8"/>
+          <p:cNvSpPr/>
+          <p:nvPr/>
+        </p:nvSpPr>
+        <p:spPr>
+          <a:xfrm>
+            <a:off x="7657668" y="91440"/>
+            <a:ext cx="73152" cy="274320"/>
+          </a:xfrm>
+          <a:prstGeom prst="rect">
+            <a:avLst/>
+          </a:prstGeom>
+          <a:solidFill>
+            <a:srgbClr val="0369A1"/>
+          </a:solidFill>
+          <a:ln w="12700">
+            <a:solidFill>
+              <a:srgbClr val="0369A1"/>
+            </a:solidFill>
+            <a:prstDash val="solid"/>
+          </a:ln>
+        </p:spPr>
+      </p:sp>
+      <p:pic>
+        <p:nvPicPr>
+          <p:cNvPr id="11" name="Image 0" descr="preencoded.png">    </p:cNvPr>
+          <p:cNvPicPr>
+            <a:picLocks noChangeAspect="1"/>
+          </p:cNvPicPr>
+          <p:nvPr/>
+        </p:nvPicPr>
+        <p:blipFill>
+          <a:blip r:embed="rId1"/>
+          <a:stretch>
+            <a:fillRect/>
+          </a:stretch>
+        </p:blipFill>
+        <p:spPr>
+          <a:xfrm>
+            <a:off x="7785684" y="128016"/>
+            <a:ext cx="201168" cy="201168"/>
+          </a:xfrm>
+          <a:prstGeom prst="rect">
+            <a:avLst/>
+          </a:prstGeom>
+        </p:spPr>
+      </p:pic>
+      <p:sp>
+        <p:nvSpPr>
+          <p:cNvPr id="12" name="Text 9"/>
+          <p:cNvSpPr txBox="1"/>
+          <p:nvPr/>
+        </p:nvSpPr>
+        <p:spPr>
+          <a:xfrm>
+            <a:off x="8041716" y="91440"/>
+            <a:ext cx="3564763" cy="274320"/>
+          </a:xfrm>
+          <a:prstGeom prst="rect">
+            <a:avLst/>
+          </a:prstGeom>
+          <a:noFill/>
+          <a:ln/>
+        </p:spPr>
+        <p:txBody>
+          <a:bodyPr wrap="square" lIns="0" tIns="0" rIns="0" bIns="0" rtlCol="0" anchor="ctr"/>
+          <a:lstStyle/>
+          <a:p>
+            <a:pPr indent="0" marL="0">
+              <a:buNone/>
+            </a:pPr>
+            <a:r>
+              <a:rPr lang="en-US" sz="1100" b="1" dirty="0">
+                <a:solidFill>
+                  <a:srgbClr val="075985"/>
+                </a:solidFill>
+                <a:latin typeface="Calibri" pitchFamily="34" charset="0"/>
+                <a:ea typeface="Calibri" pitchFamily="34" charset="-122"/>
+                <a:cs typeface="Calibri" pitchFamily="34" charset="-120"/>
+              </a:rPr>
+              <a:t>DA COMPRENDERE OGGI</a:t>
+            </a:r>
+            <a:pPr indent="0" marL="0">
+              <a:buNone/>
+            </a:pPr>
+            <a:r>
+              <a:rPr lang="en-US" sz="1100" dirty="0">
+                <a:solidFill>
+                  <a:srgbClr val="075985"/>
+                </a:solidFill>
+                <a:latin typeface="Calibri" pitchFamily="34" charset="0"/>
+                <a:ea typeface="Calibri" pitchFamily="34" charset="-122"/>
+                <a:cs typeface="Calibri" pitchFamily="34" charset="-120"/>
+              </a:rPr>
+              <a:t> · l'I/O mappato in memoria</a:t>
+            </a:r>
+            <a:endParaRPr lang="en-US" sz="1100" dirty="0"/>
           </a:p>
         </p:txBody>
       </p:sp>
@@ -14132,6 +15450,133 @@
       </p:sp>
       <p:sp>
         <p:nvSpPr>
+          <p:cNvPr id="14" name="Shape 12"/>
+          <p:cNvSpPr/>
+          <p:nvPr/>
+        </p:nvSpPr>
+        <p:spPr>
+          <a:xfrm>
+            <a:off x="7985963" y="91440"/>
+            <a:ext cx="3657092" cy="274320"/>
+          </a:xfrm>
+          <a:prstGeom prst="rect">
+            <a:avLst/>
+          </a:prstGeom>
+          <a:solidFill>
+            <a:srgbClr val="E0F2FE"/>
+          </a:solidFill>
+          <a:ln w="12700">
+            <a:solidFill>
+              <a:srgbClr val="0369A1"/>
+            </a:solidFill>
+            <a:prstDash val="solid"/>
+          </a:ln>
+        </p:spPr>
+      </p:sp>
+      <p:sp>
+        <p:nvSpPr>
+          <p:cNvPr id="15" name="Shape 13"/>
+          <p:cNvSpPr/>
+          <p:nvPr/>
+        </p:nvSpPr>
+        <p:spPr>
+          <a:xfrm>
+            <a:off x="7985963" y="91440"/>
+            <a:ext cx="73152" cy="274320"/>
+          </a:xfrm>
+          <a:prstGeom prst="rect">
+            <a:avLst/>
+          </a:prstGeom>
+          <a:solidFill>
+            <a:srgbClr val="0369A1"/>
+          </a:solidFill>
+          <a:ln w="12700">
+            <a:solidFill>
+              <a:srgbClr val="0369A1"/>
+            </a:solidFill>
+            <a:prstDash val="solid"/>
+          </a:ln>
+        </p:spPr>
+      </p:sp>
+      <p:pic>
+        <p:nvPicPr>
+          <p:cNvPr id="16" name="Image 0" descr="preencoded.png">    </p:cNvPr>
+          <p:cNvPicPr>
+            <a:picLocks noChangeAspect="1"/>
+          </p:cNvPicPr>
+          <p:nvPr/>
+        </p:nvPicPr>
+        <p:blipFill>
+          <a:blip r:embed="rId1"/>
+          <a:stretch>
+            <a:fillRect/>
+          </a:stretch>
+        </p:blipFill>
+        <p:spPr>
+          <a:xfrm>
+            <a:off x="8113979" y="128016"/>
+            <a:ext cx="201168" cy="201168"/>
+          </a:xfrm>
+          <a:prstGeom prst="rect">
+            <a:avLst/>
+          </a:prstGeom>
+        </p:spPr>
+      </p:pic>
+      <p:sp>
+        <p:nvSpPr>
+          <p:cNvPr id="17" name="Text 14"/>
+          <p:cNvSpPr txBox="1"/>
+          <p:nvPr/>
+        </p:nvSpPr>
+        <p:spPr>
+          <a:xfrm>
+            <a:off x="8370011" y="91440"/>
+            <a:ext cx="3236468" cy="274320"/>
+          </a:xfrm>
+          <a:prstGeom prst="rect">
+            <a:avLst/>
+          </a:prstGeom>
+          <a:noFill/>
+          <a:ln/>
+        </p:spPr>
+        <p:txBody>
+          <a:bodyPr wrap="square" lIns="0" tIns="0" rIns="0" bIns="0" rtlCol="0" anchor="ctr"/>
+          <a:lstStyle/>
+          <a:p>
+            <a:pPr indent="0" marL="0">
+              <a:buNone/>
+            </a:pPr>
+            <a:r>
+              <a:rPr lang="en-US" sz="1100" b="1" dirty="0">
+                <a:solidFill>
+                  <a:srgbClr val="075985"/>
+                </a:solidFill>
+                <a:latin typeface="Calibri" pitchFamily="34" charset="0"/>
+                <a:ea typeface="Calibri" pitchFamily="34" charset="-122"/>
+                <a:cs typeface="Calibri" pitchFamily="34" charset="-120"/>
+              </a:rPr>
+              <a:t>DA COMPRENDERE OGGI</a:t>
+            </a:r>
+            <a:pPr indent="0" marL="0">
+              <a:buNone/>
+            </a:pPr>
+            <a:r>
+              <a:rPr lang="en-US" sz="1100" dirty="0">
+                <a:solidFill>
+                  <a:srgbClr val="075985"/>
+                </a:solidFill>
+                <a:latin typeface="Calibri" pitchFamily="34" charset="0"/>
+                <a:ea typeface="Calibri" pitchFamily="34" charset="-122"/>
+                <a:cs typeface="Calibri" pitchFamily="34" charset="-120"/>
+              </a:rPr>
+              <a:t> · memorie e indirizzi</a:t>
+            </a:r>
+            <a:endParaRPr lang="en-US" sz="1100" dirty="0"/>
+          </a:p>
+        </p:txBody>
+      </p:sp>
+      <p:sp>
+        <p:nvSpPr>
           <p:cNvPr id="25" name="Slide Number Placeholder 0"/>
           <p:cNvSpPr>
             <a:spLocks noGrp="1"/>
@@ -15004,6 +16449,133 @@
       </p:sp>
       <p:sp>
         <p:nvSpPr>
+          <p:cNvPr id="19" name="Shape 17"/>
+          <p:cNvSpPr/>
+          <p:nvPr/>
+        </p:nvSpPr>
+        <p:spPr>
+          <a:xfrm>
+            <a:off x="7985963" y="91440"/>
+            <a:ext cx="3657092" cy="274320"/>
+          </a:xfrm>
+          <a:prstGeom prst="rect">
+            <a:avLst/>
+          </a:prstGeom>
+          <a:solidFill>
+            <a:srgbClr val="E0F2FE"/>
+          </a:solidFill>
+          <a:ln w="12700">
+            <a:solidFill>
+              <a:srgbClr val="0369A1"/>
+            </a:solidFill>
+            <a:prstDash val="solid"/>
+          </a:ln>
+        </p:spPr>
+      </p:sp>
+      <p:sp>
+        <p:nvSpPr>
+          <p:cNvPr id="20" name="Shape 18"/>
+          <p:cNvSpPr/>
+          <p:nvPr/>
+        </p:nvSpPr>
+        <p:spPr>
+          <a:xfrm>
+            <a:off x="7985963" y="91440"/>
+            <a:ext cx="73152" cy="274320"/>
+          </a:xfrm>
+          <a:prstGeom prst="rect">
+            <a:avLst/>
+          </a:prstGeom>
+          <a:solidFill>
+            <a:srgbClr val="0369A1"/>
+          </a:solidFill>
+          <a:ln w="12700">
+            <a:solidFill>
+              <a:srgbClr val="0369A1"/>
+            </a:solidFill>
+            <a:prstDash val="solid"/>
+          </a:ln>
+        </p:spPr>
+      </p:sp>
+      <p:pic>
+        <p:nvPicPr>
+          <p:cNvPr id="21" name="Image 0" descr="preencoded.png">    </p:cNvPr>
+          <p:cNvPicPr>
+            <a:picLocks noChangeAspect="1"/>
+          </p:cNvPicPr>
+          <p:nvPr/>
+        </p:nvPicPr>
+        <p:blipFill>
+          <a:blip r:embed="rId1"/>
+          <a:stretch>
+            <a:fillRect/>
+          </a:stretch>
+        </p:blipFill>
+        <p:spPr>
+          <a:xfrm>
+            <a:off x="8113979" y="128016"/>
+            <a:ext cx="201168" cy="201168"/>
+          </a:xfrm>
+          <a:prstGeom prst="rect">
+            <a:avLst/>
+          </a:prstGeom>
+        </p:spPr>
+      </p:pic>
+      <p:sp>
+        <p:nvSpPr>
+          <p:cNvPr id="22" name="Text 19"/>
+          <p:cNvSpPr txBox="1"/>
+          <p:nvPr/>
+        </p:nvSpPr>
+        <p:spPr>
+          <a:xfrm>
+            <a:off x="8370011" y="91440"/>
+            <a:ext cx="3236468" cy="274320"/>
+          </a:xfrm>
+          <a:prstGeom prst="rect">
+            <a:avLst/>
+          </a:prstGeom>
+          <a:noFill/>
+          <a:ln/>
+        </p:spPr>
+        <p:txBody>
+          <a:bodyPr wrap="square" lIns="0" tIns="0" rIns="0" bIns="0" rtlCol="0" anchor="ctr"/>
+          <a:lstStyle/>
+          <a:p>
+            <a:pPr indent="0" marL="0">
+              <a:buNone/>
+            </a:pPr>
+            <a:r>
+              <a:rPr lang="en-US" sz="1100" b="1" dirty="0">
+                <a:solidFill>
+                  <a:srgbClr val="075985"/>
+                </a:solidFill>
+                <a:latin typeface="Calibri" pitchFamily="34" charset="0"/>
+                <a:ea typeface="Calibri" pitchFamily="34" charset="-122"/>
+                <a:cs typeface="Calibri" pitchFamily="34" charset="-120"/>
+              </a:rPr>
+              <a:t>DA COMPRENDERE OGGI</a:t>
+            </a:r>
+            <a:pPr indent="0" marL="0">
+              <a:buNone/>
+            </a:pPr>
+            <a:r>
+              <a:rPr lang="en-US" sz="1100" dirty="0">
+                <a:solidFill>
+                  <a:srgbClr val="075985"/>
+                </a:solidFill>
+                <a:latin typeface="Calibri" pitchFamily="34" charset="0"/>
+                <a:ea typeface="Calibri" pitchFamily="34" charset="-122"/>
+                <a:cs typeface="Calibri" pitchFamily="34" charset="-120"/>
+              </a:rPr>
+              <a:t> · memorie e indirizzi</a:t>
+            </a:r>
+            <a:endParaRPr lang="en-US" sz="1100" dirty="0"/>
+          </a:p>
+        </p:txBody>
+      </p:sp>
+      <p:sp>
+        <p:nvSpPr>
           <p:cNvPr id="25" name="Slide Number Placeholder 0"/>
           <p:cNvSpPr>
             <a:spLocks noGrp="1"/>
@@ -16485,6 +18057,133 @@
       </p:sp>
       <p:sp>
         <p:nvSpPr>
+          <p:cNvPr id="9" name="Shape 7"/>
+          <p:cNvSpPr/>
+          <p:nvPr/>
+        </p:nvSpPr>
+        <p:spPr>
+          <a:xfrm>
+            <a:off x="7985963" y="91440"/>
+            <a:ext cx="3657092" cy="274320"/>
+          </a:xfrm>
+          <a:prstGeom prst="rect">
+            <a:avLst/>
+          </a:prstGeom>
+          <a:solidFill>
+            <a:srgbClr val="E0F2FE"/>
+          </a:solidFill>
+          <a:ln w="12700">
+            <a:solidFill>
+              <a:srgbClr val="0369A1"/>
+            </a:solidFill>
+            <a:prstDash val="solid"/>
+          </a:ln>
+        </p:spPr>
+      </p:sp>
+      <p:sp>
+        <p:nvSpPr>
+          <p:cNvPr id="10" name="Shape 8"/>
+          <p:cNvSpPr/>
+          <p:nvPr/>
+        </p:nvSpPr>
+        <p:spPr>
+          <a:xfrm>
+            <a:off x="7985963" y="91440"/>
+            <a:ext cx="73152" cy="274320"/>
+          </a:xfrm>
+          <a:prstGeom prst="rect">
+            <a:avLst/>
+          </a:prstGeom>
+          <a:solidFill>
+            <a:srgbClr val="0369A1"/>
+          </a:solidFill>
+          <a:ln w="12700">
+            <a:solidFill>
+              <a:srgbClr val="0369A1"/>
+            </a:solidFill>
+            <a:prstDash val="solid"/>
+          </a:ln>
+        </p:spPr>
+      </p:sp>
+      <p:pic>
+        <p:nvPicPr>
+          <p:cNvPr id="11" name="Image 0" descr="preencoded.png">    </p:cNvPr>
+          <p:cNvPicPr>
+            <a:picLocks noChangeAspect="1"/>
+          </p:cNvPicPr>
+          <p:nvPr/>
+        </p:nvPicPr>
+        <p:blipFill>
+          <a:blip r:embed="rId1"/>
+          <a:stretch>
+            <a:fillRect/>
+          </a:stretch>
+        </p:blipFill>
+        <p:spPr>
+          <a:xfrm>
+            <a:off x="8113979" y="128016"/>
+            <a:ext cx="201168" cy="201168"/>
+          </a:xfrm>
+          <a:prstGeom prst="rect">
+            <a:avLst/>
+          </a:prstGeom>
+        </p:spPr>
+      </p:pic>
+      <p:sp>
+        <p:nvSpPr>
+          <p:cNvPr id="12" name="Text 9"/>
+          <p:cNvSpPr txBox="1"/>
+          <p:nvPr/>
+        </p:nvSpPr>
+        <p:spPr>
+          <a:xfrm>
+            <a:off x="8370011" y="91440"/>
+            <a:ext cx="3236468" cy="274320"/>
+          </a:xfrm>
+          <a:prstGeom prst="rect">
+            <a:avLst/>
+          </a:prstGeom>
+          <a:noFill/>
+          <a:ln/>
+        </p:spPr>
+        <p:txBody>
+          <a:bodyPr wrap="square" lIns="0" tIns="0" rIns="0" bIns="0" rtlCol="0" anchor="ctr"/>
+          <a:lstStyle/>
+          <a:p>
+            <a:pPr indent="0" marL="0">
+              <a:buNone/>
+            </a:pPr>
+            <a:r>
+              <a:rPr lang="en-US" sz="1100" b="1" dirty="0">
+                <a:solidFill>
+                  <a:srgbClr val="075985"/>
+                </a:solidFill>
+                <a:latin typeface="Calibri" pitchFamily="34" charset="0"/>
+                <a:ea typeface="Calibri" pitchFamily="34" charset="-122"/>
+                <a:cs typeface="Calibri" pitchFamily="34" charset="-120"/>
+              </a:rPr>
+              <a:t>DA COMPRENDERE OGGI</a:t>
+            </a:r>
+            <a:pPr indent="0" marL="0">
+              <a:buNone/>
+            </a:pPr>
+            <a:r>
+              <a:rPr lang="en-US" sz="1100" dirty="0">
+                <a:solidFill>
+                  <a:srgbClr val="075985"/>
+                </a:solidFill>
+                <a:latin typeface="Calibri" pitchFamily="34" charset="0"/>
+                <a:ea typeface="Calibri" pitchFamily="34" charset="-122"/>
+                <a:cs typeface="Calibri" pitchFamily="34" charset="-120"/>
+              </a:rPr>
+              <a:t> · memorie e indirizzi</a:t>
+            </a:r>
+            <a:endParaRPr lang="en-US" sz="1100" dirty="0"/>
+          </a:p>
+        </p:txBody>
+      </p:sp>
+      <p:sp>
+        <p:nvSpPr>
           <p:cNvPr id="25" name="Slide Number Placeholder 0"/>
           <p:cNvSpPr>
             <a:spLocks noGrp="1"/>
@@ -16970,6 +18669,133 @@
       </p:sp>
       <p:sp>
         <p:nvSpPr>
+          <p:cNvPr id="13" name="Shape 10"/>
+          <p:cNvSpPr/>
+          <p:nvPr/>
+        </p:nvSpPr>
+        <p:spPr>
+          <a:xfrm>
+            <a:off x="7985963" y="91440"/>
+            <a:ext cx="3657092" cy="274320"/>
+          </a:xfrm>
+          <a:prstGeom prst="rect">
+            <a:avLst/>
+          </a:prstGeom>
+          <a:solidFill>
+            <a:srgbClr val="E0F2FE"/>
+          </a:solidFill>
+          <a:ln w="12700">
+            <a:solidFill>
+              <a:srgbClr val="0369A1"/>
+            </a:solidFill>
+            <a:prstDash val="solid"/>
+          </a:ln>
+        </p:spPr>
+      </p:sp>
+      <p:sp>
+        <p:nvSpPr>
+          <p:cNvPr id="14" name="Shape 11"/>
+          <p:cNvSpPr/>
+          <p:nvPr/>
+        </p:nvSpPr>
+        <p:spPr>
+          <a:xfrm>
+            <a:off x="7985963" y="91440"/>
+            <a:ext cx="73152" cy="274320"/>
+          </a:xfrm>
+          <a:prstGeom prst="rect">
+            <a:avLst/>
+          </a:prstGeom>
+          <a:solidFill>
+            <a:srgbClr val="0369A1"/>
+          </a:solidFill>
+          <a:ln w="12700">
+            <a:solidFill>
+              <a:srgbClr val="0369A1"/>
+            </a:solidFill>
+            <a:prstDash val="solid"/>
+          </a:ln>
+        </p:spPr>
+      </p:sp>
+      <p:pic>
+        <p:nvPicPr>
+          <p:cNvPr id="15" name="Image 1" descr="preencoded.png">    </p:cNvPr>
+          <p:cNvPicPr>
+            <a:picLocks noChangeAspect="1"/>
+          </p:cNvPicPr>
+          <p:nvPr/>
+        </p:nvPicPr>
+        <p:blipFill>
+          <a:blip r:embed="rId2"/>
+          <a:stretch>
+            <a:fillRect/>
+          </a:stretch>
+        </p:blipFill>
+        <p:spPr>
+          <a:xfrm>
+            <a:off x="8113979" y="128016"/>
+            <a:ext cx="201168" cy="201168"/>
+          </a:xfrm>
+          <a:prstGeom prst="rect">
+            <a:avLst/>
+          </a:prstGeom>
+        </p:spPr>
+      </p:pic>
+      <p:sp>
+        <p:nvSpPr>
+          <p:cNvPr id="16" name="Text 12"/>
+          <p:cNvSpPr txBox="1"/>
+          <p:nvPr/>
+        </p:nvSpPr>
+        <p:spPr>
+          <a:xfrm>
+            <a:off x="8370011" y="91440"/>
+            <a:ext cx="3236468" cy="274320"/>
+          </a:xfrm>
+          <a:prstGeom prst="rect">
+            <a:avLst/>
+          </a:prstGeom>
+          <a:noFill/>
+          <a:ln/>
+        </p:spPr>
+        <p:txBody>
+          <a:bodyPr wrap="square" lIns="0" tIns="0" rIns="0" bIns="0" rtlCol="0" anchor="ctr"/>
+          <a:lstStyle/>
+          <a:p>
+            <a:pPr indent="0" marL="0">
+              <a:buNone/>
+            </a:pPr>
+            <a:r>
+              <a:rPr lang="en-US" sz="1100" b="1" dirty="0">
+                <a:solidFill>
+                  <a:srgbClr val="075985"/>
+                </a:solidFill>
+                <a:latin typeface="Calibri" pitchFamily="34" charset="0"/>
+                <a:ea typeface="Calibri" pitchFamily="34" charset="-122"/>
+                <a:cs typeface="Calibri" pitchFamily="34" charset="-120"/>
+              </a:rPr>
+              <a:t>DA COMPRENDERE OGGI</a:t>
+            </a:r>
+            <a:pPr indent="0" marL="0">
+              <a:buNone/>
+            </a:pPr>
+            <a:r>
+              <a:rPr lang="en-US" sz="1100" dirty="0">
+                <a:solidFill>
+                  <a:srgbClr val="075985"/>
+                </a:solidFill>
+                <a:latin typeface="Calibri" pitchFamily="34" charset="0"/>
+                <a:ea typeface="Calibri" pitchFamily="34" charset="-122"/>
+                <a:cs typeface="Calibri" pitchFamily="34" charset="-120"/>
+              </a:rPr>
+              <a:t> · memorie e indirizzi</a:t>
+            </a:r>
+            <a:endParaRPr lang="en-US" sz="1100" dirty="0"/>
+          </a:p>
+        </p:txBody>
+      </p:sp>
+      <p:sp>
+        <p:nvSpPr>
           <p:cNvPr id="25" name="Slide Number Placeholder 0"/>
           <p:cNvSpPr>
             <a:spLocks noGrp="1"/>
@@ -17519,6 +19345,133 @@
               <a:t>n bit di indirizzo selezionano una di N locazioni: l'indirizzo è una parola codice, la memoria la decodifica</a:t>
             </a:r>
             <a:endParaRPr lang="en-US" sz="1900" dirty="0"/>
+          </a:p>
+        </p:txBody>
+      </p:sp>
+      <p:sp>
+        <p:nvSpPr>
+          <p:cNvPr id="16" name="Shape 14"/>
+          <p:cNvSpPr/>
+          <p:nvPr/>
+        </p:nvSpPr>
+        <p:spPr>
+          <a:xfrm>
+            <a:off x="7985963" y="91440"/>
+            <a:ext cx="3657092" cy="274320"/>
+          </a:xfrm>
+          <a:prstGeom prst="rect">
+            <a:avLst/>
+          </a:prstGeom>
+          <a:solidFill>
+            <a:srgbClr val="E0F2FE"/>
+          </a:solidFill>
+          <a:ln w="12700">
+            <a:solidFill>
+              <a:srgbClr val="0369A1"/>
+            </a:solidFill>
+            <a:prstDash val="solid"/>
+          </a:ln>
+        </p:spPr>
+      </p:sp>
+      <p:sp>
+        <p:nvSpPr>
+          <p:cNvPr id="17" name="Shape 15"/>
+          <p:cNvSpPr/>
+          <p:nvPr/>
+        </p:nvSpPr>
+        <p:spPr>
+          <a:xfrm>
+            <a:off x="7985963" y="91440"/>
+            <a:ext cx="73152" cy="274320"/>
+          </a:xfrm>
+          <a:prstGeom prst="rect">
+            <a:avLst/>
+          </a:prstGeom>
+          <a:solidFill>
+            <a:srgbClr val="0369A1"/>
+          </a:solidFill>
+          <a:ln w="12700">
+            <a:solidFill>
+              <a:srgbClr val="0369A1"/>
+            </a:solidFill>
+            <a:prstDash val="solid"/>
+          </a:ln>
+        </p:spPr>
+      </p:sp>
+      <p:pic>
+        <p:nvPicPr>
+          <p:cNvPr id="18" name="Image 0" descr="preencoded.png">    </p:cNvPr>
+          <p:cNvPicPr>
+            <a:picLocks noChangeAspect="1"/>
+          </p:cNvPicPr>
+          <p:nvPr/>
+        </p:nvPicPr>
+        <p:blipFill>
+          <a:blip r:embed="rId1"/>
+          <a:stretch>
+            <a:fillRect/>
+          </a:stretch>
+        </p:blipFill>
+        <p:spPr>
+          <a:xfrm>
+            <a:off x="8113979" y="128016"/>
+            <a:ext cx="201168" cy="201168"/>
+          </a:xfrm>
+          <a:prstGeom prst="rect">
+            <a:avLst/>
+          </a:prstGeom>
+        </p:spPr>
+      </p:pic>
+      <p:sp>
+        <p:nvSpPr>
+          <p:cNvPr id="19" name="Text 16"/>
+          <p:cNvSpPr txBox="1"/>
+          <p:nvPr/>
+        </p:nvSpPr>
+        <p:spPr>
+          <a:xfrm>
+            <a:off x="8370011" y="91440"/>
+            <a:ext cx="3236468" cy="274320"/>
+          </a:xfrm>
+          <a:prstGeom prst="rect">
+            <a:avLst/>
+          </a:prstGeom>
+          <a:noFill/>
+          <a:ln/>
+        </p:spPr>
+        <p:txBody>
+          <a:bodyPr wrap="square" lIns="0" tIns="0" rIns="0" bIns="0" rtlCol="0" anchor="ctr"/>
+          <a:lstStyle/>
+          <a:p>
+            <a:pPr indent="0" marL="0">
+              <a:buNone/>
+            </a:pPr>
+            <a:r>
+              <a:rPr lang="en-US" sz="1100" b="1" dirty="0">
+                <a:solidFill>
+                  <a:srgbClr val="075985"/>
+                </a:solidFill>
+                <a:latin typeface="Calibri" pitchFamily="34" charset="0"/>
+                <a:ea typeface="Calibri" pitchFamily="34" charset="-122"/>
+                <a:cs typeface="Calibri" pitchFamily="34" charset="-120"/>
+              </a:rPr>
+              <a:t>DA COMPRENDERE OGGI</a:t>
+            </a:r>
+            <a:pPr indent="0" marL="0">
+              <a:buNone/>
+            </a:pPr>
+            <a:r>
+              <a:rPr lang="en-US" sz="1100" dirty="0">
+                <a:solidFill>
+                  <a:srgbClr val="075985"/>
+                </a:solidFill>
+                <a:latin typeface="Calibri" pitchFamily="34" charset="0"/>
+                <a:ea typeface="Calibri" pitchFamily="34" charset="-122"/>
+                <a:cs typeface="Calibri" pitchFamily="34" charset="-120"/>
+              </a:rPr>
+              <a:t> · memorie e indirizzi</a:t>
+            </a:r>
+            <a:endParaRPr lang="en-US" sz="1100" dirty="0"/>
           </a:p>
         </p:txBody>
       </p:sp>

--- a/it/slides/15-Architettura_dei_Calcolatori-Memoria.pptx
+++ b/it/slides/15-Architettura_dei_Calcolatori-Memoria.pptx
@@ -126,31 +126,31 @@
   <p:extLst>
     <p:ext uri="{521415D9-36F7-43E2-AB2F-B90AF26B5E84}">
       <p14:sectionLst xmlns:p14="http://schemas.microsoft.com/office/powerpoint/2010/main">
-        <p14:section name="Apertura" id="{c51570de-cbf2-f59e-319d-d0da99dd9b75}">
+        <p14:section name="Apertura" id="{f97f479b-8e0a-9686-5d6f-21efcaf9ed7f}">
           <p14:sldIdLst>
             <p14:sldId id="256"/>
             <p14:sldId id="257"/>
           </p14:sldIdLst>
         </p14:section>
-        <p14:section name="Che cos'è una memoria?" id="{3e39806d-3de7-0e88-e46b-e17287c47b73}">
+        <p14:section name="Che cos'è una memoria?" id="{b0b0da72-8149-1ab3-d710-977a97afbc1a}">
           <p14:sldIdLst>
             <p14:sldId id="258"/>
             <p14:sldId id="259"/>
           </p14:sldIdLst>
         </p14:section>
-        <p14:section name="Un po' di storia" id="{5f554f74-949c-5bd0-a19c-dde7c38fd53d}">
+        <p14:section name="Un po' di storia" id="{88035b1d-6381-88da-c26c-383606aa763e}">
           <p14:sldIdLst>
             <p14:sldId id="260"/>
             <p14:sldId id="261"/>
           </p14:sldIdLst>
         </p14:section>
-        <p14:section name="La memoria oggi" id="{e8feaaae-befa-7a16-ac35-ac25fb5a9ecf}">
+        <p14:section name="La memoria oggi" id="{e951a8b5-4496-ab4a-1d1f-295aa0901bd6}">
           <p14:sldIdLst>
             <p14:sldId id="262"/>
             <p14:sldId id="263"/>
           </p14:sldIdLst>
         </p14:section>
-        <p14:section name="La memoria centrale" id="{6fb56d21-b42d-ce21-7abd-55253018385f}">
+        <p14:section name="La memoria centrale" id="{c191c92f-990c-89b4-c7ac-7318a7626708}">
           <p14:sldIdLst>
             <p14:sldId id="264"/>
             <p14:sldId id="265"/>
@@ -158,13 +158,13 @@
             <p14:sldId id="267"/>
           </p14:sldIdLst>
         </p14:section>
-        <p14:section name="Processore e memoria" id="{f5ce3ce4-2aae-24b6-c5f7-a055b5a7ea82}">
+        <p14:section name="Processore e memoria" id="{25311124-8732-9ded-103f-5c4ef01fad02}">
           <p14:sldIdLst>
             <p14:sldId id="268"/>
             <p14:sldId id="269"/>
           </p14:sldIdLst>
         </p14:section>
-        <p14:section name="Memoria e ingresso/uscita" id="{51c657da-9416-5145-0822-f46f20678f9d}">
+        <p14:section name="Memoria e ingresso/uscita" id="{6bfae10d-e09e-d60c-b2ab-f1b9504796d0}">
           <p14:sldIdLst>
             <p14:sldId id="270"/>
             <p14:sldId id="271"/>

--- a/it/slides/15-Architettura_dei_Calcolatori-Memoria.pptx
+++ b/it/slides/15-Architettura_dei_Calcolatori-Memoria.pptx
@@ -126,31 +126,31 @@
   <p:extLst>
     <p:ext uri="{521415D9-36F7-43E2-AB2F-B90AF26B5E84}">
       <p14:sectionLst xmlns:p14="http://schemas.microsoft.com/office/powerpoint/2010/main">
-        <p14:section name="Apertura" id="{f97f479b-8e0a-9686-5d6f-21efcaf9ed7f}">
+        <p14:section name="Apertura" id="{6e094129-dd3c-a8da-b2a2-583a51c303e7}">
           <p14:sldIdLst>
             <p14:sldId id="256"/>
             <p14:sldId id="257"/>
           </p14:sldIdLst>
         </p14:section>
-        <p14:section name="Che cos'è una memoria?" id="{b0b0da72-8149-1ab3-d710-977a97afbc1a}">
+        <p14:section name="Che cos'è una memoria?" id="{f8761a51-717b-b4b5-6176-f99cef2ab875}">
           <p14:sldIdLst>
             <p14:sldId id="258"/>
             <p14:sldId id="259"/>
           </p14:sldIdLst>
         </p14:section>
-        <p14:section name="Un po' di storia" id="{88035b1d-6381-88da-c26c-383606aa763e}">
+        <p14:section name="Un po' di storia" id="{732998d0-1fd7-7af6-809d-ecf637ef8482}">
           <p14:sldIdLst>
             <p14:sldId id="260"/>
             <p14:sldId id="261"/>
           </p14:sldIdLst>
         </p14:section>
-        <p14:section name="La memoria oggi" id="{e951a8b5-4496-ab4a-1d1f-295aa0901bd6}">
+        <p14:section name="La memoria oggi" id="{802259cc-cab2-2105-e768-eba6db3a6c0a}">
           <p14:sldIdLst>
             <p14:sldId id="262"/>
             <p14:sldId id="263"/>
           </p14:sldIdLst>
         </p14:section>
-        <p14:section name="La memoria centrale" id="{c191c92f-990c-89b4-c7ac-7318a7626708}">
+        <p14:section name="La memoria centrale" id="{481a773b-5a96-164a-7ed4-52c94fb1b4f9}">
           <p14:sldIdLst>
             <p14:sldId id="264"/>
             <p14:sldId id="265"/>
@@ -158,13 +158,13 @@
             <p14:sldId id="267"/>
           </p14:sldIdLst>
         </p14:section>
-        <p14:section name="Processore e memoria" id="{25311124-8732-9ded-103f-5c4ef01fad02}">
+        <p14:section name="Processore e memoria" id="{37383a5a-0c5c-3a42-0609-4ed5e1834f78}">
           <p14:sldIdLst>
             <p14:sldId id="268"/>
             <p14:sldId id="269"/>
           </p14:sldIdLst>
         </p14:section>
-        <p14:section name="Memoria e ingresso/uscita" id="{6bfae10d-e09e-d60c-b2ab-f1b9504796d0}">
+        <p14:section name="Memoria e ingresso/uscita" id="{12aa8125-5ccb-1b31-af6c-73fbf223eb4e}">
           <p14:sldIdLst>
             <p14:sldId id="270"/>
             <p14:sldId id="271"/>
@@ -578,7 +578,7 @@
           <a:p>
             <a:r>
               <a:rPr lang="en-US" dirty="0"/>
-              <a:t>Usate la memoria dalla seconda lezione: ogni lw e ogni sw la legge o la scrive. Questa lezione spiega che cos'è una memoria, come è organizzata, e che cosa accade davvero tra il processore e la memoria quando si esegue un load. L'immagine in copertina è il debugger di PRG32-QT, la cui vista della memoria vi farà da microscopio. La citazione da Tron è una battuta con un lato serio: una macchina con memoria può conservare uno stato, e con uno stato può fare quasi tutto.
+              <a:t>La memoria è in uso dalla seconda lezione: ogni lw e sw la legge o la scrive. Questa lezione spiega che cos'è una memoria, come è organizzata, e che cosa avviene realmente tra processore e memoria quando si esegue un caricamento. La copertina mostra il debugger di PRG32-QT, la cui vista della memoria fa da strumento di osservazione per tutta la lezione. La citazione da Tron è scherzosa ma contiene un punto serio: una macchina con memoria può conservare uno stato, e con uno stato può fare quasi tutto, come hanno stabilito le due lezioni precedenti.
 Stato di apprendimento: DA COMPRENDERE OGGI, alla fine di questa lezione lo spiegate, lo seguite passo passo e lo applicate da soli; DA UTILIZZARE OGGI, oggi seguite e usate la ricetta; come funziona dentro si spiega più avanti, o non fa parte del corso; DA COMPRENDERE PIÙ AVANTI, riconoscete il nome e lo scopo; lo spiega una lezione successiva. Una slide senza etichetta è contesto: una storia, un esempio, una domanda, un esercizio.
 Stato di apprendimento di questa lezione. DA COMPRENDERE OGGI: memorie e indirizzi; l'ordine little-endian; processore e memoria; l'I/O mappato in memoria. DA UTILIZZARE OGGI: il programma completo, gli strumenti di PRG32 (si usa, non si studia, in questo corso). DA COMPRENDERE PIÙ AVANTI: niente. Una slide senza etichetta è contesto: una storia, un esempio, una domanda, un esercizio.
 Per il docente: Spirale: lw e lbu sulla stessa parola mostrano indirizzi di byte e ordine dei byte su una vera macchina RISC-V; la lezione spiega poi che cos'è una memoria, come è organizzata e come il processore le parla. La presentazione originale usava come esempio l'MC68000 (big-endian, niente parole disallineate): RISC-V ne prende il posto.</a:t>
@@ -669,7 +669,7 @@
           <a:p>
             <a:r>
               <a:rPr lang="en-US" dirty="0"/>
-              <a:t>In una memoria indirizzabile al byte la più piccola unità dotata di indirizzo è il byte. Una parola di 32 bit occupa quindi quattro indirizzi consecutivi, e il suo indirizzo è quello del suo primo byte. La striscia mostra la parola del riscaldamento seguita da tre caratteri. Due conseguenze che avete già incontrato: il program counter avanza di 4 da un'istruzione alla successiva, e l'indice di un vettore di parole si moltiplica per 4. RISC-V ha load e store per ogni dimensione: byte, halfword e parole.
+              <a:t>In una memoria indirizzabile al byte la più piccola unità indirizzabile è il byte. Una parola a 32 bit occupa quindi quattro indirizzi consecutivi, e il suo indirizzo è quello del suo primo byte. La striscia mostra la parola del riscaldamento seguita da tre caratteri. Due conseguenze si sono già incontrate: il program counter avanza di 4 da un'istruzione alla successiva, e l'indice di un array di parole si moltiplica per 4. RISC-V fornisce caricamenti e memorizzazioni per ogni dimensione: byte, halfword e word.
 DA COMPRENDERE OGGI: memorie e indirizzi.
 Per il docente: Ogni cella è un byte di otto bit, dal più significativo (bit 7) al meno significativo (bit 0).</a:t>
             </a:r>
@@ -759,7 +759,7 @@
           <a:p>
             <a:r>
               <a:rPr lang="en-US" dirty="0"/>
-              <a:t>I due ordini dei byte di una parola. Little-endian: il byte meno significativo all'indirizzo più basso. Big-endian: prima il byte più significativo. La stessa parola, 0x10A3E6FF, è mostrata memorizzata nei due modi. RISC-V è little-endian, come quasi tutti i processori oggi in uso; i protocolli di rete, per ragioni storiche, inviano i dati big-endian. La differenza si nota guardando la memoria byte per byte, o quando due macchine diverse si scambiano dati binari.
+              <a:t>I due ordinamenti dei byte di una parola. Little-endian: il byte meno significativo all'indirizzo più basso. Big-endian: il byte più significativo per primo. La stessa parola, 0x10A3E6FF, è mostrata memorizzata nei due modi. RISC-V è little-endian, come quasi ogni processore in uso oggi; i protocolli di rete, per ragioni storiche, trasmettono i dati in big-endian. La distinzione diventa visibile quando si ispeziona la memoria byte per byte, o quando due macchine di convenzione diversa si scambiano dati binari. La slide sull'ordine dei byte della Lezione 04 è qui completata e trasformata in un esperimento.
 DA COMPRENDERE OGGI: l'ordine little-endian.
 Per il docente: La presentazione originale contrapponeva l'MC68000 (big-endian) all'Intel x86 (little-endian); i valori dell'esempio sono gli stessi. Detti anche diretto (little) e inverso (big).</a:t>
             </a:r>
@@ -849,7 +849,7 @@
           <a:p>
             <a:r>
               <a:rPr lang="en-US" dirty="0"/>
-              <a:t>Due parametri descrivono una memoria: la capacità, cioè il numero di locazioni e i bit di ciascuna, e il tempo di accesso. I numeri del kit vanno ricordati: 512 KB di SRAM, 320 KB di ROM, e una flash esterna di alcuni megabyte. Di questi, il menu di PRG32 vi dice quanto resta ai vostri programmi: circa 98 KB di RAM e 509 KB di flash per le cartucce. È otto volte un Commodore 64, e una minuscola frazione di un portatile.
+              <a:t>Due parametri caratterizzano una memoria: la sua capacità, il numero di locazioni e il numero di bit di ciascuna, e il suo tempo di accesso. Le cifre del kit meritano di essere ricordate: 512 KB di SRAM, 320 KB di ROM e una flash esterna di alcuni megabyte. Di queste, il menu di PRG32 riporta ciò che resta disponibile per i programmi: circa 98 KB di RAM e 509 KB di flash per le cartucce. È otto volte la memoria di un Commodore 64, e una frazione minima di quella di un portatile.
 DA COMPRENDERE OGGI: memorie e indirizzi.
 Per il docente: Valori dal datasheet dell'ESP32-C6 e dalla schermata Setup di PRG32 (RAM 98K, CART FLASH 509K, CART RAM 32K). Un Commodore 64 aveva 64 KB in tutto.</a:t>
             </a:r>
@@ -939,7 +939,7 @@
           <a:p>
             <a:r>
               <a:rPr lang="en-US" dirty="0"/>
-              <a:t>L'interfaccia. Dentro il processore due registri sono rivolti alla memoria: MA, il registro degli indirizzi di memoria, e MB, il registro dei dati di memoria. Li collegano alla memoria tre gruppi di linee: il bus indirizzi, che va in un solo verso, dal processore alla memoria; il bus dati, che va nei due versi; e le linee di controllo, abilitazione alla lettura e alla scrittura, che dicono che cosa si chiede. MA e MB appartengono al modello del processore: non sono tra i registri che usate in assembly.
+              <a:t>L'interfaccia. Dentro il processore due registri si affacciano sulla memoria: MA, il registro indirizzo di memoria, e MB, il registro buffer di memoria. Tre gruppi di linee li collegano alla memoria: il bus indirizzi, unidirezionale, dal processore alla memoria; il bus dati, bidirezionale; e le linee di controllo, read enable e write enable, che specificano l'operazione richiesta. MA e MB appartengono al modello di riferimento del processore della Lezione 18; sono interni e non compaiono tra i registri disponibili in assembly.
 DA COMPRENDERE OGGI: processore e memoria.
 Per il docente: MA e MB sono registri interni del modello di processore del libro (Lezione 18): non sono tra i trentadue registri che vede un programmatore RISC-V.</a:t>
             </a:r>
@@ -1029,7 +1029,7 @@
           <a:p>
             <a:r>
               <a:rPr lang="en-US" dirty="0"/>
-              <a:t>Come fanno processore e memoria a mettersi d'accordo su quando il dato è pronto? Nella tecnica asincrona la memoria segnala con una linea quando ha finito, e il processore aspetta: più complessa, ma i due si possono progettare in modo indipendente. Nella tecnica sincrona un clock scandisce l'operazione, che si completa entro un ciclo la cui durata è scelta in base alla velocità della memoria: più semplice, ed è la regola dentro un singolo chip.
+              <a:t>Come si accordano processore e memoria su quando il dato è pronto? Nella tecnica asincrona la memoria segnala il completamento su una linea dedicata e il processore attende; lo schema è più complesso, ma i due si possono progettare indipendentemente. Nella tecnica sincrona un clock scandisce l'operazione, che si completa entro un ciclo la cui durata si sceglie in base alla velocità della memoria; lo schema è più semplice, ed è la regola dentro un singolo chip.
 DA COMPRENDERE OGGI: processore e memoria.
 Per il docente: L'operazione di lettura/scrittura si può codificare in modi diversi, per esempio una sola linea R/W qualificata da un'abilitazione.</a:t>
             </a:r>
@@ -1119,7 +1119,7 @@
           <a:p>
             <a:r>
               <a:rPr lang="en-US" dirty="0"/>
-              <a:t>Due modi di collegare ingresso e uscita. Con un bus unico, l'I/O mappato in memoria, memoria e dispositivi condividono lo stesso spazio di indirizzi: un registro di un dispositivo si legge e si scrive come una locazione di memoria, senza istruzioni speciali. Con bus separati, l'I/O isolato, ci sono due spazi di indirizzi e istruzioni dedicate. RISC-V segue la prima via: non ha alcuna istruzione di ingresso o di uscita, solo load e store.
+              <a:t>Due modi di collegare ingresso e uscita. Con un bus unico, l'I/O mappato in memoria, memoria e dispositivi condividono uno spazio di indirizzamento, e un registro di dispositivo si legge e si scrive come qualsiasi locazione di memoria, senza istruzioni speciali. Con bus separati, l'I/O isolato, ci sono due spazi di indirizzamento e istruzioni dedicate. RISC-V adotta il primo approccio: non ha alcuna istruzione di ingresso o di uscita, solo caricamenti e memorizzazioni. L'uniformità semplifica l'insieme di istruzioni al costo di riservare una parte dello spazio di indirizzamento.
 DA COMPRENDERE OGGI: l'I/O mappato in memoria.
 Per il docente: Il sottosistema di I/O permette al processore di interagire con dispositivi di ingresso (tastiera, mouse), di uscita (schermo, stampante) e di ingresso/uscita (memorie di massa, schede di rete, porte seriali).</a:t>
             </a:r>
@@ -1209,7 +1209,7 @@
           <a:p>
             <a:r>
               <a:rPr lang="en-US" dirty="0"/>
-              <a:t>Il bus è in realtà tre bus: dati, indirizzi e controllo. Un altro meccanismo completa il quadro. Con l'accesso diretto alla memoria, DMA, un dispositivo scambia interi blocchi di dati direttamente con la memoria: il processore avvia il trasferimento e viene avvisato quando è finito, senza copiare da sé ogni parola. Il display del kit riceve così ogni frame, e così l'amplificatore audio.
+              <a:t>Il bus è in realtà tre bus: dati, indirizzi e controllo. Un ulteriore meccanismo completa il quadro. Con l'accesso diretto alla memoria, DMA, un dispositivo scambia interi blocchi di dati direttamente con la memoria: il processore avvia il trasferimento e viene avvisato al completamento, senza copiare egli stesso ogni parola. Il display del kit riceve ogni frame in questo modo, e così l'amplificatore audio. La Lezione 21 colloca il DMA tra i tre modi di trattare un dispositivo.
 DA COMPRENDERE OGGI: l'I/O mappato in memoria.
 Per il docente: Se più unità condividono il bus e possono accedere direttamente alla memoria, arbitra un controllore DMA. Sull'ESP32-C6 le periferiche SPI e I2S usano il DMA per trasmettere il frame buffer e i campioni audio.</a:t>
             </a:r>
@@ -1299,8 +1299,8 @@
           <a:p>
             <a:r>
               <a:rPr lang="en-US" dirty="0"/>
-              <a:t>Sedici linee di indirizzo selezionano 2 alla 16 locazioni, e ogni locazione è un byte. Ricordate che 2 alla 10 fa 1024, un kibibyte.
-Little-endian: quale byte di 0xCAFE0001 è il meno significativo? Quel byte sta all'indirizzo più basso, e lbu con scostamento 0 lo legge.
+              <a:t>Per la prima domanda: sedici linee di indirizzo selezionano 2^16 locazioni, ciascuna di un byte, e 2^10 = 1.024 byte è un kibibyte.
+Per la seconda: in ordine little-endian la domanda è quale byte di 0xCAFE0001 sia il meno significativo. Quel byte occupa l'indirizzo più basso, e lbu con spiazzamento 0 lo legge.
 Per il docente: 1. Risposta: C. 2^16 = 65.536 locazioni di un byte: 64 KiB, lo spazio di indirizzi di un Commodore 64.
 2. Risposta: D. Little-endian: il byte meno significativo, 0x01, sta all'indirizzo più basso.</a:t>
             </a:r>
@@ -1390,8 +1390,8 @@
           <a:p>
             <a:r>
               <a:rPr lang="en-US" dirty="0"/>
-              <a:t>Ricordate come la DRAM memorizza un bit: una carica in un minuscolo condensatore. Che cosa accade a una carica lasciata a se stessa? Il rinfresco non ha nulla a che vedere con la velocità o con l'accesso casuale.
-RISC-V non ha un'istruzione out né un trentatreesimo registro. I dispositivi hanno indirizzi, e un programma li raggiunge con le istruzioni che usa per la memoria.
+              <a:t>Per la prima domanda si ricorda come la DRAM memorizza un bit, come carica in un minuscolo condensatore, e ci si chiede che cosa diventa una carica lasciata a sé stessa. Il rinfresco non riguarda né la velocità né l'accesso casuale.
+Per la seconda: RISC-V non ha un'istruzione out né un trentatreesimo registro. I dispositivi hanno indirizzi, e un programma li raggiunge con le stesse istruzioni che usa per la memoria.
 Per il docente: 1. Risposta: A. Ogni bit è una carica in un condensatore che si disperde; un circuito interno alla memoria riscrive periodicamente ogni cella.
 2. Risposta: B. RISC-V non ha istruzioni di I/O: i dispositivi sono mappati in memoria e si raggiungono con normali load e store.</a:t>
             </a:r>
@@ -1481,7 +1481,7 @@
           <a:p>
             <a:r>
               <a:rPr lang="en-US" dirty="0"/>
-              <a:t>Dieci termini. Main memory è la memoria centrale. Access time è il tempo di accesso. Un magnetic core è un nucleo di ferrite. Refresh, rinfresco, è la riscrittura periodica di una DRAM. Memory-mapped I/O è l'ingresso/uscita raggiunto attraverso indirizzi di memoria. Address bus e data bus, bus indirizzi e bus dati, sono i due gruppi principali di linee dell'interfaccia.</a:t>
+              <a:t>Dieci termini. Main memory è memoria centrale. Access time è tempo di accesso. Un magnetic core è un nucleo di ferrite. Il refresh è la riscrittura periodica di una DRAM. L'I/O mappato in memoria è l'ingresso/uscita a cui si accede attraverso indirizzi di memoria. Il bus indirizzi e il bus dati sono i due gruppi principali di linee dell'interfaccia.</a:t>
             </a:r>
             <a:endParaRPr lang="en-US" dirty="0"/>
           </a:p>
@@ -1569,7 +1569,7 @@
           <a:p>
             <a:r>
               <a:rPr lang="en-US" dirty="0"/>
-              <a:t>Sei obiettivi. Classificare le memorie come volatili o persistenti, in linea o fuori linea, e collocarle in una gerarchia. Descrivere come SRAM e DRAM memorizzano un bit e perché hanno usi diversi. Spiegare parole, indirizzi e memoria indirizzabile al byte. Distinguere l'ordine little-endian da quello big-endian. Descrivere passo per passo come il processore legge e scrive una parola. E spiegare che cosa sono l'ingresso/uscita mappato in memoria e il DMA.</a:t>
+              <a:t>Sei risultati di apprendimento. Classificare le memorie in volatili o persistenti, in linea o fuori linea, e collocarle in una gerarchia. Descrivere come SRAM e DRAM memorizzano un bit e perché servono a scopi diversi. Spiegare parole, indirizzi e memoria indirizzabile al byte. Distinguere l'ordinamento little-endian da quello big-endian. Descrivere passo per passo come il processore legge e scrive una parola. E spiegare l'ingresso/uscita mappato in memoria e il DMA.</a:t>
             </a:r>
             <a:endParaRPr lang="en-US" dirty="0"/>
           </a:p>
@@ -1657,7 +1657,7 @@
           <a:p>
             <a:r>
               <a:rPr lang="en-US" dirty="0"/>
-              <a:t>Cinque conclusioni. La memoria è il componente che conserva lo stato dei dati. Tipi diversi servono a scopi diversi, perché nessuno è insieme veloce, grande ed economico. I dati si memorizzano come parole con indirizzi; RISC-V indirizza i byte e li ordina little-endian. L'accesso avviene per selezione sul bus indirizzi, trasferimento sul bus dati e linee di controllo. E in RISC-V i dispositivi si raggiungono come la memoria. La prossima lezione tratta la memoria che sopravvive quando manca l'alimentazione, e la cache.
+              <a:t>Cinque conclusioni. La memoria è il componente che conserva lo stato dei dati. Tipi diversi servono scopi diversi, perché nessuno è insieme veloce, grande ed economico. I dati si memorizzano come parole con un indirizzo; RISC-V indirizza i singoli byte e li ordina in little-endian. Un accesso procede per selezione sul bus indirizzi, trasferimento sul bus dati e coordinamento attraverso le linee di controllo. E in RISC-V i dispositivi si raggiungono esattamente come la memoria. La prossima lezione tratta la memoria che sopravvive alla rimozione dell'alimentazione, insieme alla cache.
 Stato di apprendimento, riepilogo. DA COMPRENDERE OGGI: memorie e indirizzi; l'ordine little-endian; processore e memoria; l'I/O mappato in memoria. DA UTILIZZARE OGGI: il programma completo, gli strumenti di PRG32 (si usa, non si studia, in questo corso). DA COMPRENDERE PIÙ AVANTI: niente. Una slide senza etichetta è contesto: una storia, un esempio, una domanda, un esercizio.
 Per il docente: Prossima lezione: la memoria permanente e la cache.</a:t>
             </a:r>
@@ -1747,7 +1747,7 @@
           <a:p>
             <a:r>
               <a:rPr lang="en-US" dirty="0"/>
-              <a:t>La memoria è la parte di un calcolatore dedicata a conservare i dati e le istruzioni dei programmi. La classificano due distinzioni. Le memorie volatili conservano l'informazione solo finché la macchina è alimentata; quelle persistenti la conservano a macchina spenta. In linea significa che i dati sono sempre accessibili; fuori linea significa che prima va montato un supporto, come un nastro preso da uno scaffale.
+              <a:t>La memoria è la parte di un calcolatore dedicata a conservare i dati e le istruzioni dei programmi. Due distinzioni la classificano. Le memorie volatili conservano l'informazione solo finché sono alimentate; quelle persistenti la conservano quando l'alimentazione viene tolta. In linea significa che i dati sono sempre accessibili; fuori linea significa che prima va montato un supporto, come un nastro preso da uno scaffale.
 DA COMPRENDERE OGGI: memorie e indirizzi.</a:t>
             </a:r>
             <a:endParaRPr lang="en-US" dirty="0"/>
@@ -1836,7 +1836,7 @@
           <a:p>
             <a:r>
               <a:rPr lang="en-US" dirty="0"/>
-              <a:t>La gerarchia di memoria. In cima i registri, dentro il processore; poi la cache, la memoria centrale, i dischi a stato solido e magnetici, e infine nastri e supporti rimovibili. Salendo, le memorie sono più veloci e più costose per bit; scendendo, più grandi e più economiche. I livelli alti sono volatili, quelli bassi persistenti. L'ultima riga spiega perché la gerarchia esiste: nessuna tecnologia è insieme veloce, grande ed economica, quindi un calcolatore ne combina diverse.
+              <a:t>La gerarchia delle memorie. In cima stanno i registri, dentro il processore; poi la cache, la memoria centrale, i dischi a stato solido e magnetici, e infine nastri e supporti rimovibili. Salendo, le memorie diventano più veloci e più costose per bit; scendendo, più grandi e più economiche. I livelli superiori sono volatili, quelli inferiori persistenti. L'ultima riga dice la ragione della gerarchia: nessuna tecnologia è insieme veloce, grande ed economica, quindi un calcolatore ne combina diverse e sfrutta la località dei programmi per far comportare la combinazione quasi come il livello più veloce.
 DA COMPRENDERE OGGI: memorie e indirizzi.
 Per il docente: Tipologie di memoria. Tempi di accesso tipici: registri e cache da meno di un nanosecondo a pochi nanosecondi; DRAM decine di nanosecondi; SSD decine di microsecondi; dischi magnetici millisecondi; nastro da secondi a minuti.</a:t>
             </a:r>
@@ -1926,7 +1926,7 @@
           <a:p>
             <a:r>
               <a:rPr lang="en-US" dirty="0"/>
-              <a:t>In una memoria a nuclei magnetici ogni bit è un anellino di ferrite, e il suo valore è il verso del campo magnetico nell'anello. È stata la memoria centrale dei calcolatori degli anni Cinquanta e Sessanta, e conservava il contenuto senza alimentazione. Le ricerche cominciarono con An Wang a Harvard nel 1949; Jay Forrester al MIT la rese pratica per il calcolatore Whirlwind. Guardate la fotografia: ogni anello è attraversato da fili, e un anello è un bit.
+              <a:t>In una memoria a nuclei magnetici ogni bit è un piccolo anello di ferrite, e il suo valore è il verso della magnetizzazione dell'anello. Fu la memoria centrale dei calcolatori degli anni Cinquanta e Sessanta, e conservava il suo contenuto senza alimentazione. La ricerca cominciò con An Wang a Harvard nel 1949; Jay Forrester al MIT la rese pratica per il calcolatore Whirlwind. Nella fotografia ogni anello è attraversato da fili, e ogni anello è un bit.
 Per il docente: In inglese: magnetic-core memory. Il pulse transfer controlling device di Wang usava un campo magnetico per controllare un sistema elettromeccanico.
 Immagini: HP 9101A extended memory unit.- magnetic core memory module - macro detail.jpg, Mister rf, CC BY-SA 4.0, Wikimedia Commons.</a:t>
             </a:r>
@@ -2016,7 +2016,7 @@
           <a:p>
             <a:r>
               <a:rPr lang="en-US" dirty="0"/>
-              <a:t>Come si legge e si scrive un nucleo. Due fili, X e Y, selezionano un anello. La lettura pone a 0 il bit selezionato: se conteneva un 1 compare un impulso sul filo di lettura, altrimenti nulla. Quindi la lettura distrugge il contenuto, e ogni lettura è seguita da una scrittura che memorizza di nuovo il dato. La scrittura pone a 1 il nucleo selezionato, a meno che un filo di inibizione non lo impedisca. Tenete l'idea della lettura distruttiva seguita da riscrittura: ritorna nella DRAM di oggi.
+              <a:t>Come si legge e si scrive un nucleo. Due fili, X e Y, selezionano un anello. La lettura porta il nucleo selezionato a 0: se conteneva un 1, sul filo di lettura compare un impulso, altrimenti nulla. La lettura è quindi distruttiva, e ogni lettura deve essere seguita da una scrittura che ripristini il dato. La scrittura porta il nucleo selezionato a 1, a meno che un filo di inibizione non lo impedisca. Lo schema lettura distruttiva seguita da riscrittura merita di essere ricordato, perché ricorre nella DRAM contemporanea.
 Per il docente: Lettura e inibizione condividono un filo (S|I). La lettura distruttiva seguita da riscrittura ritorna oggi nella DRAM.</a:t>
             </a:r>
             <a:endParaRPr lang="en-US" dirty="0"/>
@@ -2105,7 +2105,7 @@
           <a:p>
             <a:r>
               <a:rPr lang="en-US" dirty="0"/>
-              <a:t>I due tipi di RAM. Nella RAM statica ogni bit è tenuto da un circuito bistabile come quelli della Lezione 13: conserva il valore finché c'è alimentazione, è veloce, e richiede diversi transistor per bit, quindi è costosa: si usa per le cache. Nella RAM dinamica ogni bit è una carica in un minuscolo condensatore dietro un transistor: è densa ed economica, ma la carica si disperde, quindi il contenuto va rinfrescato periodicamente: è la memoria centrale di portatili e telefoni. Il chip del kit ha solo SRAM.
+              <a:t>Le due famiglie di memoria ad accesso casuale. Nella RAM statica ogni bit è tenuto da un circuito bistabile del tipo studiato nella Lezione 13: conserva il suo valore finché c'è alimentazione, è veloce, e richiede più transistor per bit, il che la rende costosa; si usa per le cache. Nella RAM dinamica ogni bit è una carica immagazzinata in un minuscolo condensatore dietro un solo transistor: è densa ed economica, ma la carica si disperde, quindi il contenuto va rinfrescato periodicamente; è la memoria centrale di portatili e telefoni. Il chip del kit contiene solo SRAM.
 DA COMPRENDERE OGGI: memorie e indirizzi.
 Per il docente: DDR4 e DDR5 sono generazioni di SDRAM. L'ESP32-C6 ha 512 KB di SRAM e nessuna DRAM.</a:t>
             </a:r>
@@ -2195,7 +2195,7 @@
           <a:p>
             <a:r>
               <a:rPr lang="en-US" dirty="0"/>
-              <a:t>Altre tecnologie. La RAM ferroelettrica conserva lo stato senza alimentazione. La memoria flash è persistente e si cancella a blocchi: è la memoria di chiavette USB, telefoni e dischi a stato solido. Una riga riguarda direttamente il vostro kit: in un microcontrollore il programma vive nella flash e le variabili nella SRAM. Per questo le vostre cartucce hanno una sezione di costanti e una di variabili. I moduli di memoria di un PC sono passati, negli anni, da pochi megabyte a decine di gigabyte ciascuno.
+              <a:t>Altre tecnologie. La RAM ferroelettrica conserva il suo stato senza alimentazione. La memoria flash è persistente e si cancella a blocchi; è la memoria delle chiavette USB, dei telefoni e dei dischi a stato solido, studiata nella Lezione 16. Una riga riguarda direttamente il kit: in un microcontrollore il programma risiede nella flash e le variabili nella SRAM, ed è per questo che le cartucce distinguono una sezione di costanti da una sezione di variabili. I moduli di memoria di un PC sono cresciuti, nei decenni, da pochi megabyte a decine di gigabyte ciascuno.
 DA COMPRENDERE OGGI: memorie e indirizzi.
 Per il docente: Le fotografie dei moduli della presentazione originale (SIMM EDO, SDRAM PC100 32 MB, PC133 64 MB, Rambus PC800 128 MB, DDR PC2100, ECC registered 256 MB) sono riassunte qui. Flash e dischi a stato solido si trattano nella prossima lezione.
 Immagini: Platinen-001 hg.jpg, Hannes Grobe, CC BY-SA 4.0, Wikimedia Commons.</a:t>
@@ -2286,7 +2286,7 @@
           <a:p>
             <a:r>
               <a:rPr lang="en-US" dirty="0"/>
-              <a:t>La memoria centrale è un vettore di parole, ciascuna una stringa di m bit che il processore legge o scrive con una sola operazione. Ogni parola ha un indirizzo, un numero da 0 a N meno 1 scritto su n bit, con N uguale a 2 alla n. L'indirizzo è una parola codice, e la memoria la decodifica. Accesso casuale significa che il tempo di accesso non dipende dalla posizione: ogni parola si raggiunge con la stessa rapidità. Trentadue bit di indirizzo danno quattro gibibyte di indirizzi.
+              <a:t>La memoria centrale è un array di parole, ciascuna una stringa di m bit che il processore legge o scrive in un'unica operazione. Ogni parola ha un indirizzo, un numero da 0 a N - 1 scritto su n bit, con N = 2^n. L'indirizzo è una parola di codice, e la memoria la decodifica esattamente come faceva la piccola memoria della Lezione 14. Accesso casuale significa che il tempo di accesso non dipende dalla posizione: ogni parola si raggiunge con la stessa rapidità. Trentadue bit di indirizzo danno quattro gibibyte di indirizzi.
 DA COMPRENDERE OGGI: memorie e indirizzi.
 Per il docente: Trentadue bit di indirizzo danno 2^32 indirizzi: 4 GiB. Il decodificatore della Lezione 11 e la piccola memoria della Lezione 14, su scala maggiore.</a:t>
             </a:r>
@@ -3366,7 +3366,7 @@
                 <a:ea typeface="Calibri" pitchFamily="34" charset="-122"/>
                 <a:cs typeface="Calibri" pitchFamily="34" charset="-120"/>
               </a:rPr>
-              <a:t>15-Architettura_dei_Calcolatori-Memoria-Codice.pptx</a:t>
+              <a:t>15-Architettura_dei_Calcolatori-Memoria-Lab.pptx</a:t>
             </a:r>
             <a:endParaRPr lang="en-US" sz="1300" dirty="0"/>
           </a:p>

--- a/it/slides/15-Architettura_dei_Calcolatori-Memoria.pptx
+++ b/it/slides/15-Architettura_dei_Calcolatori-Memoria.pptx
@@ -126,31 +126,31 @@
   <p:extLst>
     <p:ext uri="{521415D9-36F7-43E2-AB2F-B90AF26B5E84}">
       <p14:sectionLst xmlns:p14="http://schemas.microsoft.com/office/powerpoint/2010/main">
-        <p14:section name="Apertura" id="{6e094129-dd3c-a8da-b2a2-583a51c303e7}">
+        <p14:section name="Apertura" id="{3202cd5b-04c4-93c4-dd30-8fbce0c53218}">
           <p14:sldIdLst>
             <p14:sldId id="256"/>
             <p14:sldId id="257"/>
           </p14:sldIdLst>
         </p14:section>
-        <p14:section name="Che cos'è una memoria?" id="{f8761a51-717b-b4b5-6176-f99cef2ab875}">
+        <p14:section name="Che cos'è una memoria?" id="{72a48ac7-dd5f-3af4-4ac1-595ae11e658d}">
           <p14:sldIdLst>
             <p14:sldId id="258"/>
             <p14:sldId id="259"/>
           </p14:sldIdLst>
         </p14:section>
-        <p14:section name="Un po' di storia" id="{732998d0-1fd7-7af6-809d-ecf637ef8482}">
+        <p14:section name="Un po' di storia" id="{65a3274c-e623-aa57-5eac-9c32159f54ce}">
           <p14:sldIdLst>
             <p14:sldId id="260"/>
             <p14:sldId id="261"/>
           </p14:sldIdLst>
         </p14:section>
-        <p14:section name="La memoria oggi" id="{802259cc-cab2-2105-e768-eba6db3a6c0a}">
+        <p14:section name="La memoria oggi" id="{1a54ed35-7273-7e78-fa03-a6f2a795e3f1}">
           <p14:sldIdLst>
             <p14:sldId id="262"/>
             <p14:sldId id="263"/>
           </p14:sldIdLst>
         </p14:section>
-        <p14:section name="La memoria centrale" id="{481a773b-5a96-164a-7ed4-52c94fb1b4f9}">
+        <p14:section name="La memoria centrale" id="{24ac9461-eea1-6014-ed93-f990e79f7489}">
           <p14:sldIdLst>
             <p14:sldId id="264"/>
             <p14:sldId id="265"/>
@@ -158,13 +158,13 @@
             <p14:sldId id="267"/>
           </p14:sldIdLst>
         </p14:section>
-        <p14:section name="Processore e memoria" id="{37383a5a-0c5c-3a42-0609-4ed5e1834f78}">
+        <p14:section name="Processore e memoria" id="{6640fc54-ab01-2612-693b-ae2b7d034879}">
           <p14:sldIdLst>
             <p14:sldId id="268"/>
             <p14:sldId id="269"/>
           </p14:sldIdLst>
         </p14:section>
-        <p14:section name="Memoria e ingresso/uscita" id="{12aa8125-5ccb-1b31-af6c-73fbf223eb4e}">
+        <p14:section name="Memoria e ingresso/uscita" id="{a2839ff4-37ae-99ce-139c-70ae73081cac}">
           <p14:sldIdLst>
             <p14:sldId id="270"/>
             <p14:sldId id="271"/>

--- a/it/slides/15-Architettura_dei_Calcolatori-Memoria.pptx
+++ b/it/slides/15-Architettura_dei_Calcolatori-Memoria.pptx
@@ -126,31 +126,31 @@
   <p:extLst>
     <p:ext uri="{521415D9-36F7-43E2-AB2F-B90AF26B5E84}">
       <p14:sectionLst xmlns:p14="http://schemas.microsoft.com/office/powerpoint/2010/main">
-        <p14:section name="Apertura" id="{3202cd5b-04c4-93c4-dd30-8fbce0c53218}">
+        <p14:section name="Apertura" id="{24ab95be-a208-b7fa-4f91-40532731d4ae}">
           <p14:sldIdLst>
             <p14:sldId id="256"/>
             <p14:sldId id="257"/>
           </p14:sldIdLst>
         </p14:section>
-        <p14:section name="Che cos'è una memoria?" id="{72a48ac7-dd5f-3af4-4ac1-595ae11e658d}">
+        <p14:section name="Che cos'è una memoria?" id="{9cadfc8b-4fe9-0145-14e8-fa62864882de}">
           <p14:sldIdLst>
             <p14:sldId id="258"/>
             <p14:sldId id="259"/>
           </p14:sldIdLst>
         </p14:section>
-        <p14:section name="Un po' di storia" id="{65a3274c-e623-aa57-5eac-9c32159f54ce}">
+        <p14:section name="Un po' di storia" id="{9b76f674-7e2c-7aa9-6491-4a00b9f0d978}">
           <p14:sldIdLst>
             <p14:sldId id="260"/>
             <p14:sldId id="261"/>
           </p14:sldIdLst>
         </p14:section>
-        <p14:section name="La memoria oggi" id="{1a54ed35-7273-7e78-fa03-a6f2a795e3f1}">
+        <p14:section name="La memoria oggi" id="{0e4b7a4e-268a-49df-5d08-c16287501b32}">
           <p14:sldIdLst>
             <p14:sldId id="262"/>
             <p14:sldId id="263"/>
           </p14:sldIdLst>
         </p14:section>
-        <p14:section name="La memoria centrale" id="{24ac9461-eea1-6014-ed93-f990e79f7489}">
+        <p14:section name="La memoria centrale" id="{4e8935f5-2f20-1d59-089c-e19178ac08c7}">
           <p14:sldIdLst>
             <p14:sldId id="264"/>
             <p14:sldId id="265"/>
@@ -158,13 +158,13 @@
             <p14:sldId id="267"/>
           </p14:sldIdLst>
         </p14:section>
-        <p14:section name="Processore e memoria" id="{6640fc54-ab01-2612-693b-ae2b7d034879}">
+        <p14:section name="Processore e memoria" id="{ccac91fe-498b-0410-958f-80a8cd2644dc}">
           <p14:sldIdLst>
             <p14:sldId id="268"/>
             <p14:sldId id="269"/>
           </p14:sldIdLst>
         </p14:section>
-        <p14:section name="Memoria e ingresso/uscita" id="{a2839ff4-37ae-99ce-139c-70ae73081cac}">
+        <p14:section name="Memoria e ingresso/uscita" id="{4dcbae6a-6822-f8b4-06a6-04eeb9953ee3}">
           <p14:sldIdLst>
             <p14:sldId id="270"/>
             <p14:sldId id="271"/>
@@ -581,6 +581,8 @@
               <a:t>La memoria è in uso dalla seconda lezione: ogni lw e sw la legge o la scrive. Questa lezione spiega che cos'è una memoria, come è organizzata, e che cosa avviene realmente tra processore e memoria quando si esegue un caricamento. La copertina mostra il debugger di PRG32-QT, la cui vista della memoria fa da strumento di osservazione per tutta la lezione. La citazione da Tron è scherzosa ma contiene un punto serio: una macchina con memoria può conservare uno stato, e con uno stato può fare quasi tutto, come hanno stabilito le due lezioni precedenti.
 Stato di apprendimento: DA COMPRENDERE OGGI, alla fine di questa lezione lo spiegate, lo seguite passo passo e lo applicate da soli; DA UTILIZZARE OGGI, oggi seguite e usate la ricetta; come funziona dentro si spiega più avanti, o non fa parte del corso; DA COMPRENDERE PIÙ AVANTI, riconoscete il nome e lo scopo; lo spiega una lezione successiva. Una slide senza etichetta è contesto: una storia, un esempio, una domanda, un esercizio.
 Stato di apprendimento di questa lezione. DA COMPRENDERE OGGI: memorie e indirizzi; l'ordine little-endian; processore e memoria; l'I/O mappato in memoria. DA UTILIZZARE OGGI: il programma completo, gli strumenti di PRG32 (si usa, non si studia, in questo corso). DA COMPRENDERE PIÙ AVANTI: niente. Una slide senza etichetta è contesto: una storia, un esempio, una domanda, un esercizio.
+Percorso. I risultati di oggi: (1) calcolare la capacità di una memoria dalle sue linee di indirizzo e di dato; (2) descrivere l'interfaccia tra processore e memoria durante un caricamento; (3) spiegare l'ingresso/uscita mappato in memoria. Si appoggia su: l'ordine little-endian (Lezione 04). Prossimo passo: Lezione 16, La memoria permanente.
+Ponte. Dalla Lezione 02, lw t1, 0(t0) legge una parola a un indirizzo calcolato da t0. Oggi quell'indirizzo è quello messo sul bus degli indirizzi, registro più costante. La Lezione 19 lo chiama base più spiazzamento e lo confronta con gli altri modi di indirizzamento. Richiamo: In lw t1, 8(t0), quale indirizzo va sul bus degli indirizzi?
 Per il docente: Spirale: lw e lbu sulla stessa parola mostrano indirizzi di byte e ordine dei byte su una vera macchina RISC-V; la lezione spiega poi che cos'è una memoria, come è organizzata e come il processore le parla. La presentazione originale usava come esempio l'MC68000 (big-endian, niente parole disallineate): RISC-V ne prende il posto.</a:t>
             </a:r>
             <a:endParaRPr lang="en-US" dirty="0"/>
@@ -1658,7 +1660,7 @@
             <a:r>
               <a:rPr lang="en-US" dirty="0"/>
               <a:t>Cinque conclusioni. La memoria è il componente che conserva lo stato dei dati. Tipi diversi servono scopi diversi, perché nessuno è insieme veloce, grande ed economico. I dati si memorizzano come parole con un indirizzo; RISC-V indirizza i singoli byte e li ordina in little-endian. Un accesso procede per selezione sul bus indirizzi, trasferimento sul bus dati e coordinamento attraverso le linee di controllo. E in RISC-V i dispositivi si raggiungono esattamente come la memoria. La prossima lezione tratta la memoria che sopravvive alla rimozione dell'alimentazione, insieme alla cache.
-Stato di apprendimento, riepilogo. DA COMPRENDERE OGGI: memorie e indirizzi; l'ordine little-endian; processore e memoria; l'I/O mappato in memoria. DA UTILIZZARE OGGI: il programma completo, gli strumenti di PRG32 (si usa, non si studia, in questo corso). DA COMPRENDERE PIÙ AVANTI: niente. Una slide senza etichetta è contesto: una storia, un esempio, una domanda, un esercizio.
+Stato di apprendimento, riepilogo. DA COMPRENDERE OGGI: memorie e indirizzi; l'ordine little-endian; processore e memoria; l'I/O mappato in memoria. DA UTILIZZARE OGGI: il programma completo, gli strumenti di PRG32 (si usa, non si studia, in questo corso). DA COMPRENDERE PIÙ AVANTI: niente. Una slide senza etichetta è contesto: una storia, un esempio, una domanda, un esercizio. Il filo della lezione: Ogni lw e sw del corso è un breve dialogo sul bus degli indirizzi, sul bus dei dati e su due linee di controllo; un dispositivo risponde sullo stesso bus. Prossimo passo: la memoria che sopravvive senza alimentazione, e le cache. Biglietto d'uscita (da due a quattro minuti, da soli, su carta): 1. Elencate, in ordine, che cosa viaggia sul bus degli indirizzi, sulle linee di controllo e sul bus dei dati mentre il processore esegue lw t1, 0(t0). 2. RISC-V non ha istruzioni di ingresso/uscita. Come fa allora un programma ad accendere un LED o inviare un pixel a un dispositivo?
 Per il docente: Prossima lezione: la memoria permanente e la cache.</a:t>
             </a:r>
             <a:endParaRPr lang="en-US" dirty="0"/>
